--- a/exports/pptx/lessons/middle-module-01-what-is-iks/day-03-vedangas.pptx
+++ b/exports/pptx/lessons/middle-module-01-what-is-iks/day-03-vedangas.pptx
@@ -17,9 +17,15 @@
     <p:sldId id="265" r:id="rId11"/>
     <p:sldId id="266" r:id="rId12"/>
     <p:sldId id="267" r:id="rId13"/>
+    <p:sldId id="268" r:id="rId14"/>
+    <p:sldId id="269" r:id="rId15"/>
+    <p:sldId id="270" r:id="rId16"/>
+    <p:sldId id="271" r:id="rId17"/>
+    <p:sldId id="272" r:id="rId18"/>
+    <p:sldId id="273" r:id="rId19"/>
   </p:sldIdLst>
   <p:notesMasterIdLst>
-    <p:notesMasterId r:id="rId14"/>
+    <p:notesMasterId r:id="rId20"/>
   </p:notesMasterIdLst>
   <p:sldSz cx="9144000" cy="5143500"/>
   <p:notesSz cx="5143500" cy="9144000"/>
@@ -801,6 +807,534 @@
             <a:fld id="{F7021451-1387-4CA6-816F-3879F97B5CBC}" type="slidenum">
               <a:rPr lang="en-US"/>
               <a:t>12</a:t>
+            </a:fld>
+            <a:endParaRPr lang="en-US"/>
+          </a:p>
+        </p:txBody>
+      </p:sp>
+    </p:spTree>
+    <p:extLst>
+      <p:ext uri="{BB962C8B-B14F-4D97-AF65-F5344CB8AC3E}">
+        <p14:creationId xmlns:p14="http://schemas.microsoft.com/office/powerpoint/2010/main" val="1024086991"/>
+      </p:ext>
+    </p:extLst>
+  </p:cSld>
+  <p:clrMapOvr>
+    <a:masterClrMapping/>
+  </p:clrMapOvr>
+</p:notes>
+</file>
+
+<file path=ppt/notesSlides/notesSlide13.xml><?xml version="1.0" encoding="utf-8"?>
+<p:notes xmlns:a="http://schemas.openxmlformats.org/drawingml/2006/main" xmlns:r="http://schemas.openxmlformats.org/officeDocument/2006/relationships" xmlns:p="http://schemas.openxmlformats.org/presentationml/2006/main">
+  <p:cSld>
+    <p:spTree>
+      <p:nvGrpSpPr>
+        <p:cNvPr id="1" name=""/>
+        <p:cNvGrpSpPr/>
+        <p:nvPr/>
+      </p:nvGrpSpPr>
+      <p:grpSpPr>
+        <a:xfrm>
+          <a:off x="0" y="0"/>
+          <a:ext cx="0" cy="0"/>
+          <a:chOff x="0" y="0"/>
+          <a:chExt cx="0" cy="0"/>
+        </a:xfrm>
+      </p:grpSpPr>
+      <p:sp>
+        <p:nvSpPr>
+          <p:cNvPr id="2" name="Slide Image Placeholder 1"/>
+          <p:cNvSpPr>
+            <a:spLocks noGrp="1" noRot="1" noChangeAspect="1"/>
+          </p:cNvSpPr>
+          <p:nvPr>
+            <p:ph type="sldImg"/>
+          </p:nvPr>
+        </p:nvSpPr>
+        <p:spPr/>
+      </p:sp>
+      <p:sp>
+        <p:nvSpPr>
+          <p:cNvPr id="3" name="Notes Placeholder 2"/>
+          <p:cNvSpPr>
+            <a:spLocks noGrp="1"/>
+          </p:cNvSpPr>
+          <p:nvPr>
+            <p:ph type="body" idx="1"/>
+          </p:nvPr>
+        </p:nvSpPr>
+        <p:spPr/>
+        <p:txBody>
+          <a:bodyPr/>
+          <a:lstStyle/>
+          <a:p>
+            <a:r>
+              <a:rPr lang="en-US" dirty="0"/>
+              <a:t/>
+            </a:r>
+            <a:endParaRPr lang="en-US" dirty="0"/>
+          </a:p>
+        </p:txBody>
+      </p:sp>
+      <p:sp>
+        <p:nvSpPr>
+          <p:cNvPr id="4" name="Slide Number Placeholder 3"/>
+          <p:cNvSpPr>
+            <a:spLocks noGrp="1"/>
+          </p:cNvSpPr>
+          <p:nvPr>
+            <p:ph type="sldNum" sz="quarter" idx="10"/>
+          </p:nvPr>
+        </p:nvSpPr>
+        <p:spPr/>
+        <p:txBody>
+          <a:bodyPr/>
+          <a:lstStyle/>
+          <a:p>
+            <a:fld id="{F7021451-1387-4CA6-816F-3879F97B5CBC}" type="slidenum">
+              <a:rPr lang="en-US"/>
+              <a:t>13</a:t>
+            </a:fld>
+            <a:endParaRPr lang="en-US"/>
+          </a:p>
+        </p:txBody>
+      </p:sp>
+    </p:spTree>
+    <p:extLst>
+      <p:ext uri="{BB962C8B-B14F-4D97-AF65-F5344CB8AC3E}">
+        <p14:creationId xmlns:p14="http://schemas.microsoft.com/office/powerpoint/2010/main" val="1024086991"/>
+      </p:ext>
+    </p:extLst>
+  </p:cSld>
+  <p:clrMapOvr>
+    <a:masterClrMapping/>
+  </p:clrMapOvr>
+</p:notes>
+</file>
+
+<file path=ppt/notesSlides/notesSlide14.xml><?xml version="1.0" encoding="utf-8"?>
+<p:notes xmlns:a="http://schemas.openxmlformats.org/drawingml/2006/main" xmlns:r="http://schemas.openxmlformats.org/officeDocument/2006/relationships" xmlns:p="http://schemas.openxmlformats.org/presentationml/2006/main">
+  <p:cSld>
+    <p:spTree>
+      <p:nvGrpSpPr>
+        <p:cNvPr id="1" name=""/>
+        <p:cNvGrpSpPr/>
+        <p:nvPr/>
+      </p:nvGrpSpPr>
+      <p:grpSpPr>
+        <a:xfrm>
+          <a:off x="0" y="0"/>
+          <a:ext cx="0" cy="0"/>
+          <a:chOff x="0" y="0"/>
+          <a:chExt cx="0" cy="0"/>
+        </a:xfrm>
+      </p:grpSpPr>
+      <p:sp>
+        <p:nvSpPr>
+          <p:cNvPr id="2" name="Slide Image Placeholder 1"/>
+          <p:cNvSpPr>
+            <a:spLocks noGrp="1" noRot="1" noChangeAspect="1"/>
+          </p:cNvSpPr>
+          <p:nvPr>
+            <p:ph type="sldImg"/>
+          </p:nvPr>
+        </p:nvSpPr>
+        <p:spPr/>
+      </p:sp>
+      <p:sp>
+        <p:nvSpPr>
+          <p:cNvPr id="3" name="Notes Placeholder 2"/>
+          <p:cNvSpPr>
+            <a:spLocks noGrp="1"/>
+          </p:cNvSpPr>
+          <p:nvPr>
+            <p:ph type="body" idx="1"/>
+          </p:nvPr>
+        </p:nvSpPr>
+        <p:spPr/>
+        <p:txBody>
+          <a:bodyPr/>
+          <a:lstStyle/>
+          <a:p>
+            <a:r>
+              <a:rPr lang="en-US" dirty="0"/>
+              <a:t/>
+            </a:r>
+            <a:endParaRPr lang="en-US" dirty="0"/>
+          </a:p>
+        </p:txBody>
+      </p:sp>
+      <p:sp>
+        <p:nvSpPr>
+          <p:cNvPr id="4" name="Slide Number Placeholder 3"/>
+          <p:cNvSpPr>
+            <a:spLocks noGrp="1"/>
+          </p:cNvSpPr>
+          <p:nvPr>
+            <p:ph type="sldNum" sz="quarter" idx="10"/>
+          </p:nvPr>
+        </p:nvSpPr>
+        <p:spPr/>
+        <p:txBody>
+          <a:bodyPr/>
+          <a:lstStyle/>
+          <a:p>
+            <a:fld id="{F7021451-1387-4CA6-816F-3879F97B5CBC}" type="slidenum">
+              <a:rPr lang="en-US"/>
+              <a:t>14</a:t>
+            </a:fld>
+            <a:endParaRPr lang="en-US"/>
+          </a:p>
+        </p:txBody>
+      </p:sp>
+    </p:spTree>
+    <p:extLst>
+      <p:ext uri="{BB962C8B-B14F-4D97-AF65-F5344CB8AC3E}">
+        <p14:creationId xmlns:p14="http://schemas.microsoft.com/office/powerpoint/2010/main" val="1024086991"/>
+      </p:ext>
+    </p:extLst>
+  </p:cSld>
+  <p:clrMapOvr>
+    <a:masterClrMapping/>
+  </p:clrMapOvr>
+</p:notes>
+</file>
+
+<file path=ppt/notesSlides/notesSlide15.xml><?xml version="1.0" encoding="utf-8"?>
+<p:notes xmlns:a="http://schemas.openxmlformats.org/drawingml/2006/main" xmlns:r="http://schemas.openxmlformats.org/officeDocument/2006/relationships" xmlns:p="http://schemas.openxmlformats.org/presentationml/2006/main">
+  <p:cSld>
+    <p:spTree>
+      <p:nvGrpSpPr>
+        <p:cNvPr id="1" name=""/>
+        <p:cNvGrpSpPr/>
+        <p:nvPr/>
+      </p:nvGrpSpPr>
+      <p:grpSpPr>
+        <a:xfrm>
+          <a:off x="0" y="0"/>
+          <a:ext cx="0" cy="0"/>
+          <a:chOff x="0" y="0"/>
+          <a:chExt cx="0" cy="0"/>
+        </a:xfrm>
+      </p:grpSpPr>
+      <p:sp>
+        <p:nvSpPr>
+          <p:cNvPr id="2" name="Slide Image Placeholder 1"/>
+          <p:cNvSpPr>
+            <a:spLocks noGrp="1" noRot="1" noChangeAspect="1"/>
+          </p:cNvSpPr>
+          <p:nvPr>
+            <p:ph type="sldImg"/>
+          </p:nvPr>
+        </p:nvSpPr>
+        <p:spPr/>
+      </p:sp>
+      <p:sp>
+        <p:nvSpPr>
+          <p:cNvPr id="3" name="Notes Placeholder 2"/>
+          <p:cNvSpPr>
+            <a:spLocks noGrp="1"/>
+          </p:cNvSpPr>
+          <p:nvPr>
+            <p:ph type="body" idx="1"/>
+          </p:nvPr>
+        </p:nvSpPr>
+        <p:spPr/>
+        <p:txBody>
+          <a:bodyPr/>
+          <a:lstStyle/>
+          <a:p>
+            <a:r>
+              <a:rPr lang="en-US" dirty="0"/>
+              <a:t/>
+            </a:r>
+            <a:endParaRPr lang="en-US" dirty="0"/>
+          </a:p>
+        </p:txBody>
+      </p:sp>
+      <p:sp>
+        <p:nvSpPr>
+          <p:cNvPr id="4" name="Slide Number Placeholder 3"/>
+          <p:cNvSpPr>
+            <a:spLocks noGrp="1"/>
+          </p:cNvSpPr>
+          <p:nvPr>
+            <p:ph type="sldNum" sz="quarter" idx="10"/>
+          </p:nvPr>
+        </p:nvSpPr>
+        <p:spPr/>
+        <p:txBody>
+          <a:bodyPr/>
+          <a:lstStyle/>
+          <a:p>
+            <a:fld id="{F7021451-1387-4CA6-816F-3879F97B5CBC}" type="slidenum">
+              <a:rPr lang="en-US"/>
+              <a:t>15</a:t>
+            </a:fld>
+            <a:endParaRPr lang="en-US"/>
+          </a:p>
+        </p:txBody>
+      </p:sp>
+    </p:spTree>
+    <p:extLst>
+      <p:ext uri="{BB962C8B-B14F-4D97-AF65-F5344CB8AC3E}">
+        <p14:creationId xmlns:p14="http://schemas.microsoft.com/office/powerpoint/2010/main" val="1024086991"/>
+      </p:ext>
+    </p:extLst>
+  </p:cSld>
+  <p:clrMapOvr>
+    <a:masterClrMapping/>
+  </p:clrMapOvr>
+</p:notes>
+</file>
+
+<file path=ppt/notesSlides/notesSlide16.xml><?xml version="1.0" encoding="utf-8"?>
+<p:notes xmlns:a="http://schemas.openxmlformats.org/drawingml/2006/main" xmlns:r="http://schemas.openxmlformats.org/officeDocument/2006/relationships" xmlns:p="http://schemas.openxmlformats.org/presentationml/2006/main">
+  <p:cSld>
+    <p:spTree>
+      <p:nvGrpSpPr>
+        <p:cNvPr id="1" name=""/>
+        <p:cNvGrpSpPr/>
+        <p:nvPr/>
+      </p:nvGrpSpPr>
+      <p:grpSpPr>
+        <a:xfrm>
+          <a:off x="0" y="0"/>
+          <a:ext cx="0" cy="0"/>
+          <a:chOff x="0" y="0"/>
+          <a:chExt cx="0" cy="0"/>
+        </a:xfrm>
+      </p:grpSpPr>
+      <p:sp>
+        <p:nvSpPr>
+          <p:cNvPr id="2" name="Slide Image Placeholder 1"/>
+          <p:cNvSpPr>
+            <a:spLocks noGrp="1" noRot="1" noChangeAspect="1"/>
+          </p:cNvSpPr>
+          <p:nvPr>
+            <p:ph type="sldImg"/>
+          </p:nvPr>
+        </p:nvSpPr>
+        <p:spPr/>
+      </p:sp>
+      <p:sp>
+        <p:nvSpPr>
+          <p:cNvPr id="3" name="Notes Placeholder 2"/>
+          <p:cNvSpPr>
+            <a:spLocks noGrp="1"/>
+          </p:cNvSpPr>
+          <p:nvPr>
+            <p:ph type="body" idx="1"/>
+          </p:nvPr>
+        </p:nvSpPr>
+        <p:spPr/>
+        <p:txBody>
+          <a:bodyPr/>
+          <a:lstStyle/>
+          <a:p>
+            <a:r>
+              <a:rPr lang="en-US" dirty="0"/>
+              <a:t/>
+            </a:r>
+            <a:endParaRPr lang="en-US" dirty="0"/>
+          </a:p>
+        </p:txBody>
+      </p:sp>
+      <p:sp>
+        <p:nvSpPr>
+          <p:cNvPr id="4" name="Slide Number Placeholder 3"/>
+          <p:cNvSpPr>
+            <a:spLocks noGrp="1"/>
+          </p:cNvSpPr>
+          <p:nvPr>
+            <p:ph type="sldNum" sz="quarter" idx="10"/>
+          </p:nvPr>
+        </p:nvSpPr>
+        <p:spPr/>
+        <p:txBody>
+          <a:bodyPr/>
+          <a:lstStyle/>
+          <a:p>
+            <a:fld id="{F7021451-1387-4CA6-816F-3879F97B5CBC}" type="slidenum">
+              <a:rPr lang="en-US"/>
+              <a:t>16</a:t>
+            </a:fld>
+            <a:endParaRPr lang="en-US"/>
+          </a:p>
+        </p:txBody>
+      </p:sp>
+    </p:spTree>
+    <p:extLst>
+      <p:ext uri="{BB962C8B-B14F-4D97-AF65-F5344CB8AC3E}">
+        <p14:creationId xmlns:p14="http://schemas.microsoft.com/office/powerpoint/2010/main" val="1024086991"/>
+      </p:ext>
+    </p:extLst>
+  </p:cSld>
+  <p:clrMapOvr>
+    <a:masterClrMapping/>
+  </p:clrMapOvr>
+</p:notes>
+</file>
+
+<file path=ppt/notesSlides/notesSlide17.xml><?xml version="1.0" encoding="utf-8"?>
+<p:notes xmlns:a="http://schemas.openxmlformats.org/drawingml/2006/main" xmlns:r="http://schemas.openxmlformats.org/officeDocument/2006/relationships" xmlns:p="http://schemas.openxmlformats.org/presentationml/2006/main">
+  <p:cSld>
+    <p:spTree>
+      <p:nvGrpSpPr>
+        <p:cNvPr id="1" name=""/>
+        <p:cNvGrpSpPr/>
+        <p:nvPr/>
+      </p:nvGrpSpPr>
+      <p:grpSpPr>
+        <a:xfrm>
+          <a:off x="0" y="0"/>
+          <a:ext cx="0" cy="0"/>
+          <a:chOff x="0" y="0"/>
+          <a:chExt cx="0" cy="0"/>
+        </a:xfrm>
+      </p:grpSpPr>
+      <p:sp>
+        <p:nvSpPr>
+          <p:cNvPr id="2" name="Slide Image Placeholder 1"/>
+          <p:cNvSpPr>
+            <a:spLocks noGrp="1" noRot="1" noChangeAspect="1"/>
+          </p:cNvSpPr>
+          <p:nvPr>
+            <p:ph type="sldImg"/>
+          </p:nvPr>
+        </p:nvSpPr>
+        <p:spPr/>
+      </p:sp>
+      <p:sp>
+        <p:nvSpPr>
+          <p:cNvPr id="3" name="Notes Placeholder 2"/>
+          <p:cNvSpPr>
+            <a:spLocks noGrp="1"/>
+          </p:cNvSpPr>
+          <p:nvPr>
+            <p:ph type="body" idx="1"/>
+          </p:nvPr>
+        </p:nvSpPr>
+        <p:spPr/>
+        <p:txBody>
+          <a:bodyPr/>
+          <a:lstStyle/>
+          <a:p>
+            <a:r>
+              <a:rPr lang="en-US" dirty="0"/>
+              <a:t/>
+            </a:r>
+            <a:endParaRPr lang="en-US" dirty="0"/>
+          </a:p>
+        </p:txBody>
+      </p:sp>
+      <p:sp>
+        <p:nvSpPr>
+          <p:cNvPr id="4" name="Slide Number Placeholder 3"/>
+          <p:cNvSpPr>
+            <a:spLocks noGrp="1"/>
+          </p:cNvSpPr>
+          <p:nvPr>
+            <p:ph type="sldNum" sz="quarter" idx="10"/>
+          </p:nvPr>
+        </p:nvSpPr>
+        <p:spPr/>
+        <p:txBody>
+          <a:bodyPr/>
+          <a:lstStyle/>
+          <a:p>
+            <a:fld id="{F7021451-1387-4CA6-816F-3879F97B5CBC}" type="slidenum">
+              <a:rPr lang="en-US"/>
+              <a:t>17</a:t>
+            </a:fld>
+            <a:endParaRPr lang="en-US"/>
+          </a:p>
+        </p:txBody>
+      </p:sp>
+    </p:spTree>
+    <p:extLst>
+      <p:ext uri="{BB962C8B-B14F-4D97-AF65-F5344CB8AC3E}">
+        <p14:creationId xmlns:p14="http://schemas.microsoft.com/office/powerpoint/2010/main" val="1024086991"/>
+      </p:ext>
+    </p:extLst>
+  </p:cSld>
+  <p:clrMapOvr>
+    <a:masterClrMapping/>
+  </p:clrMapOvr>
+</p:notes>
+</file>
+
+<file path=ppt/notesSlides/notesSlide18.xml><?xml version="1.0" encoding="utf-8"?>
+<p:notes xmlns:a="http://schemas.openxmlformats.org/drawingml/2006/main" xmlns:r="http://schemas.openxmlformats.org/officeDocument/2006/relationships" xmlns:p="http://schemas.openxmlformats.org/presentationml/2006/main">
+  <p:cSld>
+    <p:spTree>
+      <p:nvGrpSpPr>
+        <p:cNvPr id="1" name=""/>
+        <p:cNvGrpSpPr/>
+        <p:nvPr/>
+      </p:nvGrpSpPr>
+      <p:grpSpPr>
+        <a:xfrm>
+          <a:off x="0" y="0"/>
+          <a:ext cx="0" cy="0"/>
+          <a:chOff x="0" y="0"/>
+          <a:chExt cx="0" cy="0"/>
+        </a:xfrm>
+      </p:grpSpPr>
+      <p:sp>
+        <p:nvSpPr>
+          <p:cNvPr id="2" name="Slide Image Placeholder 1"/>
+          <p:cNvSpPr>
+            <a:spLocks noGrp="1" noRot="1" noChangeAspect="1"/>
+          </p:cNvSpPr>
+          <p:nvPr>
+            <p:ph type="sldImg"/>
+          </p:nvPr>
+        </p:nvSpPr>
+        <p:spPr/>
+      </p:sp>
+      <p:sp>
+        <p:nvSpPr>
+          <p:cNvPr id="3" name="Notes Placeholder 2"/>
+          <p:cNvSpPr>
+            <a:spLocks noGrp="1"/>
+          </p:cNvSpPr>
+          <p:nvPr>
+            <p:ph type="body" idx="1"/>
+          </p:nvPr>
+        </p:nvSpPr>
+        <p:spPr/>
+        <p:txBody>
+          <a:bodyPr/>
+          <a:lstStyle/>
+          <a:p>
+            <a:r>
+              <a:rPr lang="en-US" dirty="0"/>
+              <a:t/>
+            </a:r>
+            <a:endParaRPr lang="en-US" dirty="0"/>
+          </a:p>
+        </p:txBody>
+      </p:sp>
+      <p:sp>
+        <p:nvSpPr>
+          <p:cNvPr id="4" name="Slide Number Placeholder 3"/>
+          <p:cNvSpPr>
+            <a:spLocks noGrp="1"/>
+          </p:cNvSpPr>
+          <p:nvPr>
+            <p:ph type="sldNum" sz="quarter" idx="10"/>
+          </p:nvPr>
+        </p:nvSpPr>
+        <p:spPr/>
+        <p:txBody>
+          <a:bodyPr/>
+          <a:lstStyle/>
+          <a:p>
+            <a:fld id="{F7021451-1387-4CA6-816F-3879F97B5CBC}" type="slidenum">
+              <a:rPr lang="en-US"/>
+              <a:t>18</a:t>
             </a:fld>
             <a:endParaRPr lang="en-US"/>
           </a:p>
@@ -2054,102 +2588,6 @@
         </p:nvSpPr>
         <p:spPr>
           <a:xfrm>
-            <a:off x="406301" y="1223963"/>
-            <a:ext cx="8498026" cy="274290"/>
-          </a:xfrm>
-          <a:prstGeom prst="rect">
-            <a:avLst/>
-          </a:prstGeom>
-          <a:noFill/>
-          <a:ln/>
-        </p:spPr>
-        <p:txBody>
-          <a:bodyPr wrap="square" lIns="0" tIns="0" rIns="0" bIns="0" rtlCol="0" anchor="t"/>
-          <a:lstStyle/>
-          <a:p>
-            <a:pPr algn="l" indent="0" marL="0">
-              <a:lnSpc>
-                <a:spcPts val="2160"/>
-              </a:lnSpc>
-              <a:spcBef>
-                <a:spcPts val="600"/>
-              </a:spcBef>
-              <a:spcAft>
-                <a:spcPts val="800"/>
-              </a:spcAft>
-              <a:buNone/>
-            </a:pPr>
-            <a:r>
-              <a:rPr lang="en-US" sz="1800" b="1" dirty="0">
-                <a:solidFill>
-                  <a:srgbClr val="FE4447"/>
-                </a:solidFill>
-                <a:latin typeface="Georgia" pitchFamily="34" charset="0"/>
-                <a:ea typeface="Georgia" pitchFamily="34" charset="-122"/>
-                <a:cs typeface="Georgia" pitchFamily="34" charset="-120"/>
-              </a:rPr>
-              <a:t>Learning objective</a:t>
-            </a:r>
-            <a:endParaRPr lang="en-US" sz="1800" dirty="0"/>
-          </a:p>
-        </p:txBody>
-      </p:sp>
-      <p:sp>
-        <p:nvSpPr>
-          <p:cNvPr id="6" name="Text 4"/>
-          <p:cNvSpPr/>
-          <p:nvPr/>
-        </p:nvSpPr>
-        <p:spPr>
-          <a:xfrm>
-            <a:off x="406301" y="1637854"/>
-            <a:ext cx="8498026" cy="426541"/>
-          </a:xfrm>
-          <a:prstGeom prst="rect">
-            <a:avLst/>
-          </a:prstGeom>
-          <a:noFill/>
-          <a:ln/>
-        </p:spPr>
-        <p:txBody>
-          <a:bodyPr wrap="square" lIns="0" tIns="0" rIns="0" bIns="0" rtlCol="0" anchor="t"/>
-          <a:lstStyle/>
-          <a:p>
-            <a:pPr algn="l" indent="0" marL="0">
-              <a:lnSpc>
-                <a:spcPts val="1680"/>
-              </a:lnSpc>
-              <a:spcBef>
-                <a:spcPts val="300"/>
-              </a:spcBef>
-              <a:spcAft>
-                <a:spcPts val="300"/>
-              </a:spcAft>
-              <a:buNone/>
-            </a:pPr>
-            <a:r>
-              <a:rPr lang="en-US" sz="1200" dirty="0">
-                <a:solidFill>
-                  <a:srgbClr val="1C2833"/>
-                </a:solidFill>
-                <a:latin typeface="Arial" pitchFamily="34" charset="0"/>
-                <a:ea typeface="Arial" pitchFamily="34" charset="-122"/>
-                <a:cs typeface="Arial" pitchFamily="34" charset="-120"/>
-              </a:rPr>
-              <a:t>Students name the six Vedāṅgas (auxiliary disciplines) and match each to its function in preserving and applying Vedic knowledge.</a:t>
-            </a:r>
-            <a:endParaRPr lang="en-US" sz="1200" dirty="0"/>
-          </a:p>
-        </p:txBody>
-      </p:sp>
-      <p:sp>
-        <p:nvSpPr>
-          <p:cNvPr id="7" name="Text 5"/>
-          <p:cNvSpPr/>
-          <p:nvPr/>
-        </p:nvSpPr>
-        <p:spPr>
-          <a:xfrm>
             <a:off x="406301" y="4434929"/>
             <a:ext cx="8498026" cy="213271"/>
           </a:xfrm>
@@ -2294,7 +2732,7 @@
                 <a:ea typeface="Georgia" pitchFamily="34" charset="-122"/>
                 <a:cs typeface="Georgia" pitchFamily="34" charset="-120"/>
               </a:rPr>
-              <a:t>Differentiation</a:t>
+              <a:t>Core (20 min) (cont.)</a:t>
             </a:r>
             <a:endParaRPr lang="en-US" sz="1800" dirty="0"/>
           </a:p>
@@ -2309,7 +2747,7 @@
         <p:spPr>
           <a:xfrm>
             <a:off x="634901" y="883593"/>
-            <a:ext cx="8102798" cy="731341"/>
+            <a:ext cx="8102798" cy="281880"/>
           </a:xfrm>
           <a:prstGeom prst="rect">
             <a:avLst/>
@@ -2331,17 +2769,6 @@
               <a:buSzPct val="100000"/>
               <a:buChar char="•"/>
             </a:pPr>
-            <a:r>
-              <a:rPr lang="en-US" sz="1200" b="1" dirty="0">
-                <a:solidFill>
-                  <a:srgbClr val="1C2833"/>
-                </a:solidFill>
-                <a:latin typeface="Arial" pitchFamily="34" charset="0"/>
-                <a:ea typeface="Arial" pitchFamily="34" charset="-122"/>
-                <a:cs typeface="Arial" pitchFamily="34" charset="-120"/>
-              </a:rPr>
-              <a:t>Tier up:</a:t>
-            </a:r>
             <a:pPr algn="l" indent="0" marL="0">
               <a:lnSpc>
                 <a:spcPts val="1620"/>
@@ -2352,6 +2779,26 @@
               <a:buNone/>
             </a:pPr>
             <a:r>
+              <a:rPr lang="en-US" sz="1200" i="1" dirty="0">
+                <a:solidFill>
+                  <a:srgbClr val="1C2833"/>
+                </a:solidFill>
+                <a:latin typeface="Arial" pitchFamily="34" charset="0"/>
+                <a:ea typeface="Arial" pitchFamily="34" charset="-122"/>
+                <a:cs typeface="Arial" pitchFamily="34" charset="-120"/>
+              </a:rPr>
+              <a:t>One stand-out: Pāṇini's</a:t>
+            </a:r>
+            <a:pPr algn="l" indent="0" marL="0">
+              <a:lnSpc>
+                <a:spcPts val="1620"/>
+              </a:lnSpc>
+              <a:spcAft>
+                <a:spcPts val="300"/>
+              </a:spcAft>
+              <a:buNone/>
+            </a:pPr>
+            <a:r>
               <a:rPr lang="en-US" sz="1200" dirty="0">
                 <a:solidFill>
                   <a:srgbClr val="1C2833"/>
@@ -2360,10 +2807,72 @@
                 <a:ea typeface="Arial" pitchFamily="34" charset="-122"/>
                 <a:cs typeface="Arial" pitchFamily="34" charset="-120"/>
               </a:rPr>
-              <a:t> Read about the Chomsky-Pāṇini connection — find 1 specific example of Pāṇinian influence on modern linguistics.</a:t>
+              <a:t>Aṣṭādhyāyī</a:t>
+            </a:r>
+            <a:pPr algn="l" indent="0" marL="0">
+              <a:lnSpc>
+                <a:spcPts val="1620"/>
+              </a:lnSpc>
+              <a:spcAft>
+                <a:spcPts val="300"/>
+              </a:spcAft>
+              <a:buNone/>
+            </a:pPr>
+            <a:r>
+              <a:rPr lang="en-US" sz="1200" i="1" dirty="0">
+                <a:solidFill>
+                  <a:srgbClr val="1C2833"/>
+                </a:solidFill>
+                <a:latin typeface="Arial" pitchFamily="34" charset="0"/>
+                <a:ea typeface="Arial" pitchFamily="34" charset="-122"/>
+                <a:cs typeface="Arial" pitchFamily="34" charset="-120"/>
+              </a:rPr>
+              <a:t> (~4th c. BCE)</a:t>
+            </a:r>
+            <a:pPr algn="l" indent="0" marL="0">
+              <a:lnSpc>
+                <a:spcPts val="1620"/>
+              </a:lnSpc>
+              <a:spcAft>
+                <a:spcPts val="300"/>
+              </a:spcAft>
+              <a:buNone/>
+            </a:pPr>
+            <a:r>
+              <a:rPr lang="en-US" sz="1200" dirty="0">
+                <a:solidFill>
+                  <a:srgbClr val="1C2833"/>
+                </a:solidFill>
+                <a:latin typeface="Arial" pitchFamily="34" charset="0"/>
+                <a:ea typeface="Arial" pitchFamily="34" charset="-122"/>
+                <a:cs typeface="Arial" pitchFamily="34" charset="-120"/>
+              </a:rPr>
+              <a:t>*.</a:t>
             </a:r>
             <a:endParaRPr lang="en-US" sz="1200" dirty="0"/>
           </a:p>
+        </p:txBody>
+      </p:sp>
+      <p:sp>
+        <p:nvSpPr>
+          <p:cNvPr id="5" name="Text 3"/>
+          <p:cNvSpPr/>
+          <p:nvPr/>
+        </p:nvSpPr>
+        <p:spPr>
+          <a:xfrm>
+            <a:off x="634901" y="1266974"/>
+            <a:ext cx="8102798" cy="1013222"/>
+          </a:xfrm>
+          <a:prstGeom prst="rect">
+            <a:avLst/>
+          </a:prstGeom>
+          <a:noFill/>
+          <a:ln/>
+        </p:spPr>
+        <p:txBody>
+          <a:bodyPr wrap="square" lIns="0" tIns="0" rIns="0" bIns="0" rtlCol="0" anchor="t"/>
+          <a:lstStyle/>
           <a:p>
             <a:pPr algn="l" marL="342900" indent="-342900">
               <a:lnSpc>
@@ -2376,24 +2885,28 @@
               <a:buChar char="•"/>
             </a:pPr>
             <a:r>
-              <a:rPr lang="en-US" sz="1200" b="1" dirty="0">
-                <a:solidFill>
-                  <a:srgbClr val="1C2833"/>
-                </a:solidFill>
-                <a:latin typeface="Arial" pitchFamily="34" charset="0"/>
-                <a:ea typeface="Arial" pitchFamily="34" charset="-122"/>
-                <a:cs typeface="Arial" pitchFamily="34" charset="-120"/>
-              </a:rPr>
-              <a:t>Tier down:</a:t>
-            </a:r>
-            <a:pPr algn="l" indent="0" marL="0">
+              <a:rPr lang="en-US" sz="1200" dirty="0">
+                <a:solidFill>
+                  <a:srgbClr val="1C2833"/>
+                </a:solidFill>
+                <a:latin typeface="Arial" pitchFamily="34" charset="0"/>
+                <a:ea typeface="Arial" pitchFamily="34" charset="-122"/>
+                <a:cs typeface="Arial" pitchFamily="34" charset="-120"/>
+              </a:rPr>
+              <a:t>~4000 sūtras describing Sanskrit grammar.</a:t>
+            </a:r>
+            <a:endParaRPr lang="en-US" sz="1200" dirty="0"/>
+          </a:p>
+          <a:p>
+            <a:pPr algn="l" marL="342900" indent="-342900">
               <a:lnSpc>
                 <a:spcPts val="1620"/>
               </a:lnSpc>
               <a:spcAft>
                 <a:spcPts val="300"/>
               </a:spcAft>
-              <a:buNone/>
+              <a:buSzPct val="100000"/>
+              <a:buChar char="•"/>
             </a:pPr>
             <a:r>
               <a:rPr lang="en-US" sz="1200" dirty="0">
@@ -2404,15 +2917,63 @@
                 <a:ea typeface="Arial" pitchFamily="34" charset="-122"/>
                 <a:cs typeface="Arial" pitchFamily="34" charset="-120"/>
               </a:rPr>
-              <a:t> Memorise just 3 Vedāṅgas: Vyākaraṇa, Jyotiṣa, Kalpa.</a:t>
+              <a:t>Considered the first known formal grammar of any language.</a:t>
             </a:r>
             <a:endParaRPr lang="en-US" sz="1200" dirty="0"/>
           </a:p>
-        </p:txBody>
-      </p:sp>
-      <p:sp>
-        <p:nvSpPr>
-          <p:cNvPr id="5" name="Text 3"/>
+          <a:p>
+            <a:pPr algn="l" marL="342900" indent="-342900">
+              <a:lnSpc>
+                <a:spcPts val="1620"/>
+              </a:lnSpc>
+              <a:spcAft>
+                <a:spcPts val="300"/>
+              </a:spcAft>
+              <a:buSzPct val="100000"/>
+              <a:buChar char="•"/>
+            </a:pPr>
+            <a:r>
+              <a:rPr lang="en-US" sz="1200" dirty="0">
+                <a:solidFill>
+                  <a:srgbClr val="1C2833"/>
+                </a:solidFill>
+                <a:latin typeface="Arial" pitchFamily="34" charset="0"/>
+                <a:ea typeface="Arial" pitchFamily="34" charset="-122"/>
+                <a:cs typeface="Arial" pitchFamily="34" charset="-120"/>
+              </a:rPr>
+              <a:t>Influenced modern formal-language theory (Chomsky's generative grammar acknowledges Pāṇinian inspiration).</a:t>
+            </a:r>
+            <a:endParaRPr lang="en-US" sz="1200" dirty="0"/>
+          </a:p>
+          <a:p>
+            <a:pPr algn="l" marL="342900" indent="-342900">
+              <a:lnSpc>
+                <a:spcPts val="1620"/>
+              </a:lnSpc>
+              <a:spcAft>
+                <a:spcPts val="300"/>
+              </a:spcAft>
+              <a:buSzPct val="100000"/>
+              <a:buChar char="•"/>
+            </a:pPr>
+            <a:r>
+              <a:rPr lang="en-US" sz="1200" dirty="0">
+                <a:solidFill>
+                  <a:srgbClr val="1C2833"/>
+                </a:solidFill>
+                <a:latin typeface="Arial" pitchFamily="34" charset="0"/>
+                <a:ea typeface="Arial" pitchFamily="34" charset="-122"/>
+                <a:cs typeface="Arial" pitchFamily="34" charset="-120"/>
+              </a:rPr>
+              <a:t>A single Vedāṅga (vyākaraṇa) produced one of the most important works in the history of linguistics.</a:t>
+            </a:r>
+            <a:endParaRPr lang="en-US" sz="1200" dirty="0"/>
+          </a:p>
+        </p:txBody>
+      </p:sp>
+      <p:sp>
+        <p:nvSpPr>
+          <p:cNvPr id="6" name="Text 4"/>
           <p:cNvSpPr/>
           <p:nvPr/>
         </p:nvSpPr>
@@ -2562,7 +3123,7 @@
                 <a:ea typeface="Georgia" pitchFamily="34" charset="-122"/>
                 <a:cs typeface="Georgia" pitchFamily="34" charset="-120"/>
               </a:rPr>
-              <a:t>Teacher notes</a:t>
+              <a:t>Core (20 min) (cont.)</a:t>
             </a:r>
             <a:endParaRPr lang="en-US" sz="1800" dirty="0"/>
           </a:p>
@@ -2576,8 +3137,8 @@
         </p:nvSpPr>
         <p:spPr>
           <a:xfrm>
-            <a:off x="406301" y="870942"/>
-            <a:ext cx="8498026" cy="639812"/>
+            <a:off x="634901" y="883593"/>
+            <a:ext cx="8102798" cy="281880"/>
           </a:xfrm>
           <a:prstGeom prst="rect">
             <a:avLst/>
@@ -2589,17 +3150,61 @@
           <a:bodyPr wrap="square" lIns="0" tIns="0" rIns="0" bIns="0" rtlCol="0" anchor="t"/>
           <a:lstStyle/>
           <a:p>
-            <a:pPr algn="l" indent="0" marL="0">
-              <a:lnSpc>
-                <a:spcPts val="1680"/>
-              </a:lnSpc>
-              <a:spcBef>
-                <a:spcPts val="300"/>
-              </a:spcBef>
-              <a:spcAft>
-                <a:spcPts val="300"/>
-              </a:spcAft>
-              <a:buNone/>
+            <a:pPr algn="l" marL="342900" indent="-342900">
+              <a:lnSpc>
+                <a:spcPts val="1620"/>
+              </a:lnSpc>
+              <a:spcAft>
+                <a:spcPts val="300"/>
+              </a:spcAft>
+              <a:buSzPct val="100000"/>
+              <a:buChar char="•"/>
+            </a:pPr>
+            <a:r>
+              <a:rPr lang="en-US" sz="1200" b="1" dirty="0">
+                <a:solidFill>
+                  <a:srgbClr val="1C2833"/>
+                </a:solidFill>
+                <a:latin typeface="Arial" pitchFamily="34" charset="0"/>
+                <a:ea typeface="Arial" pitchFamily="34" charset="-122"/>
+                <a:cs typeface="Arial" pitchFamily="34" charset="-120"/>
+              </a:rPr>
+              <a:t>One more stand-out: Jyotiṣa.</a:t>
+            </a:r>
+            <a:endParaRPr lang="en-US" sz="1200" dirty="0"/>
+          </a:p>
+        </p:txBody>
+      </p:sp>
+      <p:sp>
+        <p:nvSpPr>
+          <p:cNvPr id="5" name="Text 3"/>
+          <p:cNvSpPr/>
+          <p:nvPr/>
+        </p:nvSpPr>
+        <p:spPr>
+          <a:xfrm>
+            <a:off x="634901" y="1266974"/>
+            <a:ext cx="8102798" cy="487561"/>
+          </a:xfrm>
+          <a:prstGeom prst="rect">
+            <a:avLst/>
+          </a:prstGeom>
+          <a:noFill/>
+          <a:ln/>
+        </p:spPr>
+        <p:txBody>
+          <a:bodyPr wrap="square" lIns="0" tIns="0" rIns="0" bIns="0" rtlCol="0" anchor="t"/>
+          <a:lstStyle/>
+          <a:p>
+            <a:pPr algn="l" marL="342900" indent="-342900">
+              <a:lnSpc>
+                <a:spcPts val="1620"/>
+              </a:lnSpc>
+              <a:spcAft>
+                <a:spcPts val="300"/>
+              </a:spcAft>
+              <a:buSzPct val="100000"/>
+              <a:buChar char="•"/>
             </a:pPr>
             <a:r>
               <a:rPr lang="en-US" sz="1200" dirty="0">
@@ -2610,7 +3215,7 @@
                 <a:ea typeface="Arial" pitchFamily="34" charset="-122"/>
                 <a:cs typeface="Arial" pitchFamily="34" charset="-120"/>
               </a:rPr>
-              <a:t>– Students often confuse Jyotiṣa with horoscope-astrology. Distinguish: the discipline contained BOTH planetary calculation AND interpretive use. Modern science separates these. – The "first formal grammar" claim about Pāṇini is mainstream scholarly view (Cardona, Kiparsky, etc.). Defensible.</a:t>
+              <a:t>The astronomy/astrology pair. Distinguish: jyotiṣa contains BOTH calculation (astronomy) and interpretation (astrology). Modern science separates these; the Indian tradition kept them together.</a:t>
             </a:r>
             <a:endParaRPr lang="en-US" sz="1200" dirty="0"/>
           </a:p>
@@ -2618,7 +3223,7 @@
       </p:sp>
       <p:sp>
         <p:nvSpPr>
-          <p:cNvPr id="5" name="Text 3"/>
+          <p:cNvPr id="6" name="Text 4"/>
           <p:cNvSpPr/>
           <p:nvPr/>
         </p:nvSpPr>
@@ -2768,7 +3373,7 @@
                 <a:ea typeface="Georgia" pitchFamily="34" charset="-122"/>
                 <a:cs typeface="Georgia" pitchFamily="34" charset="-120"/>
               </a:rPr>
-              <a:t>Citation(s) used</a:t>
+              <a:t>Activity (15 min) — Matching game</a:t>
             </a:r>
             <a:endParaRPr lang="en-US" sz="1800" dirty="0"/>
           </a:p>
@@ -2783,7 +3388,7 @@
         <p:spPr>
           <a:xfrm>
             <a:off x="406301" y="870942"/>
-            <a:ext cx="8498026" cy="213271"/>
+            <a:ext cx="8498026" cy="426541"/>
           </a:xfrm>
           <a:prstGeom prst="rect">
             <a:avLst/>
@@ -2816,8 +3421,33 @@
                 <a:ea typeface="Arial" pitchFamily="34" charset="-122"/>
                 <a:cs typeface="Arial" pitchFamily="34" charset="-120"/>
               </a:rPr>
-              <a:t>– Pollock (2006) on Vedic disciplines. – Cardona, G. (1997). </a:t>
-            </a:r>
+              <a:t>Pairs. 12 cards (6 Sanskrit names + 6 function descriptions) shuffled face-down. Memory-match game. First pair done writes their match on the board.</a:t>
+            </a:r>
+            <a:endParaRPr lang="en-US" sz="1200" dirty="0"/>
+          </a:p>
+        </p:txBody>
+      </p:sp>
+      <p:sp>
+        <p:nvSpPr>
+          <p:cNvPr id="5" name="Text 3"/>
+          <p:cNvSpPr/>
+          <p:nvPr/>
+        </p:nvSpPr>
+        <p:spPr>
+          <a:xfrm>
+            <a:off x="406301" y="1373684"/>
+            <a:ext cx="8498026" cy="213271"/>
+          </a:xfrm>
+          <a:prstGeom prst="rect">
+            <a:avLst/>
+          </a:prstGeom>
+          <a:noFill/>
+          <a:ln/>
+        </p:spPr>
+        <p:txBody>
+          <a:bodyPr wrap="square" lIns="0" tIns="0" rIns="0" bIns="0" rtlCol="0" anchor="t"/>
+          <a:lstStyle/>
+          <a:p>
             <a:pPr algn="l" indent="0" marL="0">
               <a:lnSpc>
                 <a:spcPts val="1680"/>
@@ -2831,6 +3461,29 @@
               <a:buNone/>
             </a:pPr>
             <a:r>
+              <a:rPr lang="en-US" sz="1200" dirty="0">
+                <a:solidFill>
+                  <a:srgbClr val="1C2833"/>
+                </a:solidFill>
+                <a:latin typeface="Arial" pitchFamily="34" charset="0"/>
+                <a:ea typeface="Arial" pitchFamily="34" charset="-122"/>
+                <a:cs typeface="Arial" pitchFamily="34" charset="-120"/>
+              </a:rPr>
+              <a:t>Then class discusses: </a:t>
+            </a:r>
+            <a:pPr algn="l" indent="0" marL="0">
+              <a:lnSpc>
+                <a:spcPts val="1680"/>
+              </a:lnSpc>
+              <a:spcBef>
+                <a:spcPts val="300"/>
+              </a:spcBef>
+              <a:spcAft>
+                <a:spcPts val="300"/>
+              </a:spcAft>
+              <a:buNone/>
+            </a:pPr>
+            <a:r>
               <a:rPr lang="en-US" sz="1200" i="1" dirty="0">
                 <a:solidFill>
                   <a:srgbClr val="1C2833"/>
@@ -2839,15 +3492,1649 @@
                 <a:ea typeface="Arial" pitchFamily="34" charset="-122"/>
                 <a:cs typeface="Arial" pitchFamily="34" charset="-120"/>
               </a:rPr>
+              <a:t>"Which Vedāṅga surprised you most? Why?"</a:t>
+            </a:r>
+            <a:endParaRPr lang="en-US" sz="1200" dirty="0"/>
+          </a:p>
+        </p:txBody>
+      </p:sp>
+      <p:sp>
+        <p:nvSpPr>
+          <p:cNvPr id="6" name="Text 4"/>
+          <p:cNvSpPr/>
+          <p:nvPr/>
+        </p:nvSpPr>
+        <p:spPr>
+          <a:xfrm>
+            <a:off x="406301" y="4434929"/>
+            <a:ext cx="8498026" cy="213271"/>
+          </a:xfrm>
+          <a:prstGeom prst="rect">
+            <a:avLst/>
+          </a:prstGeom>
+          <a:noFill/>
+          <a:ln/>
+        </p:spPr>
+        <p:txBody>
+          <a:bodyPr wrap="square" lIns="0" tIns="0" rIns="0" bIns="0" rtlCol="0" anchor="t"/>
+          <a:lstStyle/>
+          <a:p>
+            <a:pPr algn="l" indent="0" marL="0">
+              <a:lnSpc>
+                <a:spcPts val="1680"/>
+              </a:lnSpc>
+              <a:spcBef>
+                <a:spcPts val="300"/>
+              </a:spcBef>
+              <a:spcAft>
+                <a:spcPts val="300"/>
+              </a:spcAft>
+              <a:buNone/>
+            </a:pPr>
+            <a:r>
+              <a:rPr lang="en-US" sz="1200" dirty="0">
+                <a:solidFill>
+                  <a:srgbClr val="1C2833"/>
+                </a:solidFill>
+                <a:latin typeface="Arial" pitchFamily="34" charset="0"/>
+                <a:ea typeface="Arial" pitchFamily="34" charset="-122"/>
+                <a:cs typeface="Arial" pitchFamily="34" charset="-120"/>
+              </a:rPr>
+              <a:t>Middle ·  · IKS Curriculum</a:t>
+            </a:r>
+            <a:endParaRPr lang="en-US" sz="1200" dirty="0"/>
+          </a:p>
+        </p:txBody>
+      </p:sp>
+    </p:spTree>
+  </p:cSld>
+  <p:clrMapOvr>
+    <a:masterClrMapping/>
+  </p:clrMapOvr>
+</p:sld>
+</file>
+
+<file path=ppt/slides/slide13.xml><?xml version="1.0" encoding="utf-8"?>
+<p:sld xmlns:a="http://schemas.openxmlformats.org/drawingml/2006/main" xmlns:r="http://schemas.openxmlformats.org/officeDocument/2006/relationships" xmlns:p="http://schemas.openxmlformats.org/presentationml/2006/main">
+  <p:cSld name="Slide 13">
+    <p:bg>
+      <p:bgPr>
+        <a:solidFill>
+          <a:srgbClr val="FFFFFF"/>
+        </a:solidFill>
+      </p:bgPr>
+    </p:bg>
+    <p:spTree>
+      <p:nvGrpSpPr>
+        <p:cNvPr id="1" name=""/>
+        <p:cNvGrpSpPr/>
+        <p:nvPr/>
+      </p:nvGrpSpPr>
+      <p:grpSpPr>
+        <a:xfrm>
+          <a:off x="0" y="0"/>
+          <a:ext cx="0" cy="0"/>
+          <a:chOff x="0" y="0"/>
+          <a:chExt cx="0" cy="0"/>
+        </a:xfrm>
+      </p:grpSpPr>
+      <p:sp>
+        <p:nvSpPr>
+          <p:cNvPr id="2" name="Text 0"/>
+          <p:cNvSpPr/>
+          <p:nvPr/>
+        </p:nvSpPr>
+        <p:spPr>
+          <a:xfrm>
+            <a:off x="0" y="0"/>
+            <a:ext cx="9144000" cy="101501"/>
+          </a:xfrm>
+          <a:prstGeom prst="rect">
+            <a:avLst/>
+          </a:prstGeom>
+          <a:solidFill>
+            <a:srgbClr val="277884"/>
+          </a:solidFill>
+          <a:ln/>
+        </p:spPr>
+        <p:txBody>
+          <a:bodyPr wrap="square" rtlCol="0" anchor="ctr"/>
+          <a:lstStyle/>
+          <a:p>
+            <a:pPr indent="0" marL="0">
+              <a:buNone/>
+            </a:pPr>
+            <a:endParaRPr lang="en-US" dirty="0"/>
+          </a:p>
+        </p:txBody>
+      </p:sp>
+      <p:sp>
+        <p:nvSpPr>
+          <p:cNvPr id="3" name="Text 1"/>
+          <p:cNvSpPr/>
+          <p:nvPr/>
+        </p:nvSpPr>
+        <p:spPr>
+          <a:xfrm>
+            <a:off x="406301" y="457051"/>
+            <a:ext cx="8498026" cy="274290"/>
+          </a:xfrm>
+          <a:prstGeom prst="rect">
+            <a:avLst/>
+          </a:prstGeom>
+          <a:noFill/>
+          <a:ln/>
+        </p:spPr>
+        <p:txBody>
+          <a:bodyPr wrap="square" lIns="0" tIns="0" rIns="0" bIns="0" rtlCol="0" anchor="t"/>
+          <a:lstStyle/>
+          <a:p>
+            <a:pPr algn="l" indent="0" marL="0">
+              <a:lnSpc>
+                <a:spcPts val="2160"/>
+              </a:lnSpc>
+              <a:spcBef>
+                <a:spcPts val="600"/>
+              </a:spcBef>
+              <a:spcAft>
+                <a:spcPts val="800"/>
+              </a:spcAft>
+              <a:buNone/>
+            </a:pPr>
+            <a:r>
+              <a:rPr lang="en-US" sz="1800" b="1" dirty="0">
+                <a:solidFill>
+                  <a:srgbClr val="FE4447"/>
+                </a:solidFill>
+                <a:latin typeface="Georgia" pitchFamily="34" charset="0"/>
+                <a:ea typeface="Georgia" pitchFamily="34" charset="-122"/>
+                <a:cs typeface="Georgia" pitchFamily="34" charset="-120"/>
+              </a:rPr>
+              <a:t>Wrap-up (5 min)</a:t>
+            </a:r>
+            <a:endParaRPr lang="en-US" sz="1800" dirty="0"/>
+          </a:p>
+        </p:txBody>
+      </p:sp>
+      <p:sp>
+        <p:nvSpPr>
+          <p:cNvPr id="4" name="Text 2"/>
+          <p:cNvSpPr/>
+          <p:nvPr/>
+        </p:nvSpPr>
+        <p:spPr>
+          <a:xfrm>
+            <a:off x="634901" y="883593"/>
+            <a:ext cx="8102798" cy="525661"/>
+          </a:xfrm>
+          <a:prstGeom prst="rect">
+            <a:avLst/>
+          </a:prstGeom>
+          <a:noFill/>
+          <a:ln/>
+        </p:spPr>
+        <p:txBody>
+          <a:bodyPr wrap="square" lIns="0" tIns="0" rIns="0" bIns="0" rtlCol="0" anchor="t"/>
+          <a:lstStyle/>
+          <a:p>
+            <a:pPr algn="l" marL="342900" indent="-342900">
+              <a:lnSpc>
+                <a:spcPts val="1620"/>
+              </a:lnSpc>
+              <a:spcAft>
+                <a:spcPts val="300"/>
+              </a:spcAft>
+              <a:buSzPct val="100000"/>
+              <a:buChar char="•"/>
+            </a:pPr>
+            <a:r>
+              <a:rPr lang="en-US" sz="1200" dirty="0">
+                <a:solidFill>
+                  <a:srgbClr val="1C2833"/>
+                </a:solidFill>
+                <a:latin typeface="Arial" pitchFamily="34" charset="0"/>
+                <a:ea typeface="Arial" pitchFamily="34" charset="-122"/>
+                <a:cs typeface="Arial" pitchFamily="34" charset="-120"/>
+              </a:rPr>
+              <a:t>Exit ticket: name 3 of the 6 Vedāṅgas with their functions.</a:t>
+            </a:r>
+            <a:endParaRPr lang="en-US" sz="1200" dirty="0"/>
+          </a:p>
+          <a:p>
+            <a:pPr algn="l" marL="342900" indent="-342900">
+              <a:lnSpc>
+                <a:spcPts val="1620"/>
+              </a:lnSpc>
+              <a:spcAft>
+                <a:spcPts val="300"/>
+              </a:spcAft>
+              <a:buSzPct val="100000"/>
+              <a:buChar char="•"/>
+            </a:pPr>
+            <a:r>
+              <a:rPr lang="en-US" sz="1200" dirty="0">
+                <a:solidFill>
+                  <a:srgbClr val="1C2833"/>
+                </a:solidFill>
+                <a:latin typeface="Arial" pitchFamily="34" charset="0"/>
+                <a:ea typeface="Arial" pitchFamily="34" charset="-122"/>
+                <a:cs typeface="Arial" pitchFamily="34" charset="-120"/>
+              </a:rPr>
+              <a:t>Preview Day 4: </a:t>
+            </a:r>
+            <a:pPr algn="l" indent="0" marL="0">
+              <a:lnSpc>
+                <a:spcPts val="1620"/>
+              </a:lnSpc>
+              <a:spcAft>
+                <a:spcPts val="300"/>
+              </a:spcAft>
+              <a:buNone/>
+            </a:pPr>
+            <a:r>
+              <a:rPr lang="en-US" sz="1200" i="1" dirty="0">
+                <a:solidFill>
+                  <a:srgbClr val="1C2833"/>
+                </a:solidFill>
+                <a:latin typeface="Arial" pitchFamily="34" charset="0"/>
+                <a:ea typeface="Arial" pitchFamily="34" charset="-122"/>
+                <a:cs typeface="Arial" pitchFamily="34" charset="-120"/>
+              </a:rPr>
+              <a:t>"Tomorrow — the Upavedas. Four APPLIED sciences."</a:t>
+            </a:r>
+            <a:endParaRPr lang="en-US" sz="1200" dirty="0"/>
+          </a:p>
+        </p:txBody>
+      </p:sp>
+      <p:sp>
+        <p:nvSpPr>
+          <p:cNvPr id="5" name="Text 3"/>
+          <p:cNvSpPr/>
+          <p:nvPr/>
+        </p:nvSpPr>
+        <p:spPr>
+          <a:xfrm>
+            <a:off x="406301" y="4434929"/>
+            <a:ext cx="8498026" cy="213271"/>
+          </a:xfrm>
+          <a:prstGeom prst="rect">
+            <a:avLst/>
+          </a:prstGeom>
+          <a:noFill/>
+          <a:ln/>
+        </p:spPr>
+        <p:txBody>
+          <a:bodyPr wrap="square" lIns="0" tIns="0" rIns="0" bIns="0" rtlCol="0" anchor="t"/>
+          <a:lstStyle/>
+          <a:p>
+            <a:pPr algn="l" indent="0" marL="0">
+              <a:lnSpc>
+                <a:spcPts val="1680"/>
+              </a:lnSpc>
+              <a:spcBef>
+                <a:spcPts val="300"/>
+              </a:spcBef>
+              <a:spcAft>
+                <a:spcPts val="300"/>
+              </a:spcAft>
+              <a:buNone/>
+            </a:pPr>
+            <a:r>
+              <a:rPr lang="en-US" sz="1200" dirty="0">
+                <a:solidFill>
+                  <a:srgbClr val="1C2833"/>
+                </a:solidFill>
+                <a:latin typeface="Arial" pitchFamily="34" charset="0"/>
+                <a:ea typeface="Arial" pitchFamily="34" charset="-122"/>
+                <a:cs typeface="Arial" pitchFamily="34" charset="-120"/>
+              </a:rPr>
+              <a:t>Middle ·  · IKS Curriculum</a:t>
+            </a:r>
+            <a:endParaRPr lang="en-US" sz="1200" dirty="0"/>
+          </a:p>
+        </p:txBody>
+      </p:sp>
+    </p:spTree>
+  </p:cSld>
+  <p:clrMapOvr>
+    <a:masterClrMapping/>
+  </p:clrMapOvr>
+</p:sld>
+</file>
+
+<file path=ppt/slides/slide14.xml><?xml version="1.0" encoding="utf-8"?>
+<p:sld xmlns:a="http://schemas.openxmlformats.org/drawingml/2006/main" xmlns:r="http://schemas.openxmlformats.org/officeDocument/2006/relationships" xmlns:p="http://schemas.openxmlformats.org/presentationml/2006/main">
+  <p:cSld name="Slide 14">
+    <p:bg>
+      <p:bgPr>
+        <a:solidFill>
+          <a:srgbClr val="FFFFFF"/>
+        </a:solidFill>
+      </p:bgPr>
+    </p:bg>
+    <p:spTree>
+      <p:nvGrpSpPr>
+        <p:cNvPr id="1" name=""/>
+        <p:cNvGrpSpPr/>
+        <p:nvPr/>
+      </p:nvGrpSpPr>
+      <p:grpSpPr>
+        <a:xfrm>
+          <a:off x="0" y="0"/>
+          <a:ext cx="0" cy="0"/>
+          <a:chOff x="0" y="0"/>
+          <a:chExt cx="0" cy="0"/>
+        </a:xfrm>
+      </p:grpSpPr>
+      <p:sp>
+        <p:nvSpPr>
+          <p:cNvPr id="2" name="Text 0"/>
+          <p:cNvSpPr/>
+          <p:nvPr/>
+        </p:nvSpPr>
+        <p:spPr>
+          <a:xfrm>
+            <a:off x="0" y="0"/>
+            <a:ext cx="9144000" cy="101501"/>
+          </a:xfrm>
+          <a:prstGeom prst="rect">
+            <a:avLst/>
+          </a:prstGeom>
+          <a:solidFill>
+            <a:srgbClr val="277884"/>
+          </a:solidFill>
+          <a:ln/>
+        </p:spPr>
+        <p:txBody>
+          <a:bodyPr wrap="square" rtlCol="0" anchor="ctr"/>
+          <a:lstStyle/>
+          <a:p>
+            <a:pPr indent="0" marL="0">
+              <a:buNone/>
+            </a:pPr>
+            <a:endParaRPr lang="en-US" dirty="0"/>
+          </a:p>
+        </p:txBody>
+      </p:sp>
+      <p:sp>
+        <p:nvSpPr>
+          <p:cNvPr id="3" name="Text 1"/>
+          <p:cNvSpPr/>
+          <p:nvPr/>
+        </p:nvSpPr>
+        <p:spPr>
+          <a:xfrm>
+            <a:off x="406301" y="457051"/>
+            <a:ext cx="8498026" cy="274290"/>
+          </a:xfrm>
+          <a:prstGeom prst="rect">
+            <a:avLst/>
+          </a:prstGeom>
+          <a:noFill/>
+          <a:ln/>
+        </p:spPr>
+        <p:txBody>
+          <a:bodyPr wrap="square" lIns="0" tIns="0" rIns="0" bIns="0" rtlCol="0" anchor="t"/>
+          <a:lstStyle/>
+          <a:p>
+            <a:pPr algn="l" indent="0" marL="0">
+              <a:lnSpc>
+                <a:spcPts val="2160"/>
+              </a:lnSpc>
+              <a:spcBef>
+                <a:spcPts val="600"/>
+              </a:spcBef>
+              <a:spcAft>
+                <a:spcPts val="800"/>
+              </a:spcAft>
+              <a:buNone/>
+            </a:pPr>
+            <a:r>
+              <a:rPr lang="en-US" sz="1800" b="1" dirty="0">
+                <a:solidFill>
+                  <a:srgbClr val="FE4447"/>
+                </a:solidFill>
+                <a:latin typeface="Georgia" pitchFamily="34" charset="0"/>
+                <a:ea typeface="Georgia" pitchFamily="34" charset="-122"/>
+                <a:cs typeface="Georgia" pitchFamily="34" charset="-120"/>
+              </a:rPr>
+              <a:t>Student-facing content</a:t>
+            </a:r>
+            <a:endParaRPr lang="en-US" sz="1800" dirty="0"/>
+          </a:p>
+        </p:txBody>
+      </p:sp>
+      <p:sp>
+        <p:nvSpPr>
+          <p:cNvPr id="4" name="Text 2"/>
+          <p:cNvSpPr/>
+          <p:nvPr/>
+        </p:nvSpPr>
+        <p:spPr>
+          <a:xfrm>
+            <a:off x="406301" y="883593"/>
+            <a:ext cx="8331398" cy="1843088"/>
+          </a:xfrm>
+          <a:prstGeom prst="rect">
+            <a:avLst/>
+          </a:prstGeom>
+          <a:solidFill>
+            <a:srgbClr val="F4F8F9"/>
+          </a:solidFill>
+          <a:ln/>
+        </p:spPr>
+        <p:txBody>
+          <a:bodyPr wrap="square" rtlCol="0" anchor="ctr"/>
+          <a:lstStyle/>
+          <a:p>
+            <a:pPr indent="0" marL="0">
+              <a:buNone/>
+            </a:pPr>
+            <a:endParaRPr lang="en-US" dirty="0"/>
+          </a:p>
+        </p:txBody>
+      </p:sp>
+      <p:sp>
+        <p:nvSpPr>
+          <p:cNvPr id="5" name="Shape 3"/>
+          <p:cNvSpPr/>
+          <p:nvPr/>
+        </p:nvSpPr>
+        <p:spPr>
+          <a:xfrm>
+            <a:off x="434876" y="883593"/>
+            <a:ext cx="0" cy="1843088"/>
+          </a:xfrm>
+          <a:prstGeom prst="line">
+            <a:avLst/>
+          </a:prstGeom>
+          <a:noFill/>
+          <a:ln w="57150">
+            <a:solidFill>
+              <a:srgbClr val="FE4447"/>
+            </a:solidFill>
+            <a:prstDash val="solid"/>
+          </a:ln>
+        </p:spPr>
+      </p:sp>
+      <p:sp>
+        <p:nvSpPr>
+          <p:cNvPr id="6" name="Text 4"/>
+          <p:cNvSpPr/>
+          <p:nvPr/>
+        </p:nvSpPr>
+        <p:spPr>
+          <a:xfrm>
+            <a:off x="692051" y="1074093"/>
+            <a:ext cx="7973389" cy="230981"/>
+          </a:xfrm>
+          <a:prstGeom prst="rect">
+            <a:avLst/>
+          </a:prstGeom>
+          <a:noFill/>
+          <a:ln/>
+        </p:spPr>
+        <p:txBody>
+          <a:bodyPr wrap="square" lIns="0" tIns="0" rIns="0" bIns="0" rtlCol="0" anchor="t"/>
+          <a:lstStyle/>
+          <a:p>
+            <a:pPr algn="l" indent="0" marL="0">
+              <a:lnSpc>
+                <a:spcPts val="1820"/>
+              </a:lnSpc>
+              <a:spcBef>
+                <a:spcPts val="300"/>
+              </a:spcBef>
+              <a:spcAft>
+                <a:spcPts val="300"/>
+              </a:spcAft>
+              <a:buNone/>
+            </a:pPr>
+            <a:r>
+              <a:rPr lang="en-US" sz="1300" b="1" i="1" dirty="0">
+                <a:solidFill>
+                  <a:srgbClr val="1C2833"/>
+                </a:solidFill>
+                <a:latin typeface="Georgia" pitchFamily="34" charset="0"/>
+                <a:ea typeface="Georgia" pitchFamily="34" charset="-122"/>
+                <a:cs typeface="Georgia" pitchFamily="34" charset="-120"/>
+              </a:rPr>
+              <a:t>The Six Vedāṅgas — "limbs of the Veda"</a:t>
+            </a:r>
+            <a:endParaRPr lang="en-US" sz="1300" dirty="0"/>
+          </a:p>
+        </p:txBody>
+      </p:sp>
+      <p:sp>
+        <p:nvSpPr>
+          <p:cNvPr id="7" name="Text 5"/>
+          <p:cNvSpPr/>
+          <p:nvPr/>
+        </p:nvSpPr>
+        <p:spPr>
+          <a:xfrm>
+            <a:off x="692051" y="1343174"/>
+            <a:ext cx="7973389" cy="692944"/>
+          </a:xfrm>
+          <a:prstGeom prst="rect">
+            <a:avLst/>
+          </a:prstGeom>
+          <a:noFill/>
+          <a:ln/>
+        </p:spPr>
+        <p:txBody>
+          <a:bodyPr wrap="square" lIns="0" tIns="0" rIns="0" bIns="0" rtlCol="0" anchor="t"/>
+          <a:lstStyle/>
+          <a:p>
+            <a:pPr algn="l" indent="0" marL="0">
+              <a:lnSpc>
+                <a:spcPts val="1820"/>
+              </a:lnSpc>
+              <a:spcBef>
+                <a:spcPts val="300"/>
+              </a:spcBef>
+              <a:spcAft>
+                <a:spcPts val="300"/>
+              </a:spcAft>
+              <a:buNone/>
+            </a:pPr>
+            <a:r>
+              <a:rPr lang="en-US" sz="1300" i="1" dirty="0">
+                <a:solidFill>
+                  <a:srgbClr val="1C2833"/>
+                </a:solidFill>
+                <a:latin typeface="Georgia" pitchFamily="34" charset="0"/>
+                <a:ea typeface="Georgia" pitchFamily="34" charset="-122"/>
+                <a:cs typeface="Georgia" pitchFamily="34" charset="-120"/>
+              </a:rPr>
+              <a:t>| # | Sanskrit | Function | |---|----------|----------| | 1 | Śikṣā | Pronunciation, phonetics | | 2 | Kalpa | Ritual procedure | | 3 | Vyākaraṇa | Grammar | | 4 | Nirukta | Etymology | | 5 | Chandas | Poetic metre | | 6 | Jyotiṣa | Astronomy &amp; astrology |</a:t>
+            </a:r>
+            <a:endParaRPr lang="en-US" sz="1300" dirty="0"/>
+          </a:p>
+        </p:txBody>
+      </p:sp>
+      <p:sp>
+        <p:nvSpPr>
+          <p:cNvPr id="8" name="Text 6"/>
+          <p:cNvSpPr/>
+          <p:nvPr/>
+        </p:nvSpPr>
+        <p:spPr>
+          <a:xfrm>
+            <a:off x="692051" y="2074218"/>
+            <a:ext cx="7973389" cy="461963"/>
+          </a:xfrm>
+          <a:prstGeom prst="rect">
+            <a:avLst/>
+          </a:prstGeom>
+          <a:noFill/>
+          <a:ln/>
+        </p:spPr>
+        <p:txBody>
+          <a:bodyPr wrap="square" lIns="0" tIns="0" rIns="0" bIns="0" rtlCol="0" anchor="t"/>
+          <a:lstStyle/>
+          <a:p>
+            <a:pPr algn="l" indent="0" marL="0">
+              <a:lnSpc>
+                <a:spcPts val="1820"/>
+              </a:lnSpc>
+              <a:spcBef>
+                <a:spcPts val="300"/>
+              </a:spcBef>
+              <a:spcAft>
+                <a:spcPts val="300"/>
+              </a:spcAft>
+              <a:buNone/>
+            </a:pPr>
+            <a:r>
+              <a:rPr lang="en-US" sz="1300" dirty="0">
+                <a:solidFill>
+                  <a:srgbClr val="1C2833"/>
+                </a:solidFill>
+                <a:latin typeface="Georgia" pitchFamily="34" charset="0"/>
+                <a:ea typeface="Georgia" pitchFamily="34" charset="-122"/>
+                <a:cs typeface="Georgia" pitchFamily="34" charset="-120"/>
+              </a:rPr>
+              <a:t>*</a:t>
+            </a:r>
+            <a:pPr algn="l" indent="0" marL="0">
+              <a:lnSpc>
+                <a:spcPts val="1820"/>
+              </a:lnSpc>
+              <a:spcBef>
+                <a:spcPts val="300"/>
+              </a:spcBef>
+              <a:spcAft>
+                <a:spcPts val="300"/>
+              </a:spcAft>
+              <a:buNone/>
+            </a:pPr>
+            <a:r>
+              <a:rPr lang="en-US" sz="1300" i="1" dirty="0">
+                <a:solidFill>
+                  <a:srgbClr val="1C2833"/>
+                </a:solidFill>
+                <a:latin typeface="Georgia" pitchFamily="34" charset="0"/>
+                <a:ea typeface="Georgia" pitchFamily="34" charset="-122"/>
+                <a:cs typeface="Georgia" pitchFamily="34" charset="-120"/>
+              </a:rPr>
+              <a:t>Pāṇini's</a:t>
+            </a:r>
+            <a:pPr algn="l" indent="0" marL="0">
+              <a:lnSpc>
+                <a:spcPts val="1820"/>
+              </a:lnSpc>
+              <a:spcBef>
+                <a:spcPts val="300"/>
+              </a:spcBef>
+              <a:spcAft>
+                <a:spcPts val="300"/>
+              </a:spcAft>
+              <a:buNone/>
+            </a:pPr>
+            <a:r>
+              <a:rPr lang="en-US" sz="1300" dirty="0">
+                <a:solidFill>
+                  <a:srgbClr val="1C2833"/>
+                </a:solidFill>
+                <a:latin typeface="Georgia" pitchFamily="34" charset="0"/>
+                <a:ea typeface="Georgia" pitchFamily="34" charset="-122"/>
+                <a:cs typeface="Georgia" pitchFamily="34" charset="-120"/>
+              </a:rPr>
+              <a:t>Aṣṭādhyāyī*** (~4th c. BCE) — under Vyākaraṇa — is widely considered the first formal grammar of any language. ~4000 sūtras.</a:t>
+            </a:r>
+            <a:endParaRPr lang="en-US" sz="1300" dirty="0"/>
+          </a:p>
+        </p:txBody>
+      </p:sp>
+      <p:sp>
+        <p:nvSpPr>
+          <p:cNvPr id="9" name="Text 7"/>
+          <p:cNvSpPr/>
+          <p:nvPr/>
+        </p:nvSpPr>
+        <p:spPr>
+          <a:xfrm>
+            <a:off x="406301" y="4434929"/>
+            <a:ext cx="8498026" cy="213271"/>
+          </a:xfrm>
+          <a:prstGeom prst="rect">
+            <a:avLst/>
+          </a:prstGeom>
+          <a:noFill/>
+          <a:ln/>
+        </p:spPr>
+        <p:txBody>
+          <a:bodyPr wrap="square" lIns="0" tIns="0" rIns="0" bIns="0" rtlCol="0" anchor="t"/>
+          <a:lstStyle/>
+          <a:p>
+            <a:pPr algn="l" indent="0" marL="0">
+              <a:lnSpc>
+                <a:spcPts val="1680"/>
+              </a:lnSpc>
+              <a:spcBef>
+                <a:spcPts val="300"/>
+              </a:spcBef>
+              <a:spcAft>
+                <a:spcPts val="300"/>
+              </a:spcAft>
+              <a:buNone/>
+            </a:pPr>
+            <a:r>
+              <a:rPr lang="en-US" sz="1200" dirty="0">
+                <a:solidFill>
+                  <a:srgbClr val="1C2833"/>
+                </a:solidFill>
+                <a:latin typeface="Arial" pitchFamily="34" charset="0"/>
+                <a:ea typeface="Arial" pitchFamily="34" charset="-122"/>
+                <a:cs typeface="Arial" pitchFamily="34" charset="-120"/>
+              </a:rPr>
+              <a:t>Middle ·  · IKS Curriculum</a:t>
+            </a:r>
+            <a:endParaRPr lang="en-US" sz="1200" dirty="0"/>
+          </a:p>
+        </p:txBody>
+      </p:sp>
+    </p:spTree>
+  </p:cSld>
+  <p:clrMapOvr>
+    <a:masterClrMapping/>
+  </p:clrMapOvr>
+</p:sld>
+</file>
+
+<file path=ppt/slides/slide15.xml><?xml version="1.0" encoding="utf-8"?>
+<p:sld xmlns:a="http://schemas.openxmlformats.org/drawingml/2006/main" xmlns:r="http://schemas.openxmlformats.org/officeDocument/2006/relationships" xmlns:p="http://schemas.openxmlformats.org/presentationml/2006/main">
+  <p:cSld name="Slide 15">
+    <p:bg>
+      <p:bgPr>
+        <a:solidFill>
+          <a:srgbClr val="FFFFFF"/>
+        </a:solidFill>
+      </p:bgPr>
+    </p:bg>
+    <p:spTree>
+      <p:nvGrpSpPr>
+        <p:cNvPr id="1" name=""/>
+        <p:cNvGrpSpPr/>
+        <p:nvPr/>
+      </p:nvGrpSpPr>
+      <p:grpSpPr>
+        <a:xfrm>
+          <a:off x="0" y="0"/>
+          <a:ext cx="0" cy="0"/>
+          <a:chOff x="0" y="0"/>
+          <a:chExt cx="0" cy="0"/>
+        </a:xfrm>
+      </p:grpSpPr>
+      <p:sp>
+        <p:nvSpPr>
+          <p:cNvPr id="2" name="Text 0"/>
+          <p:cNvSpPr/>
+          <p:nvPr/>
+        </p:nvSpPr>
+        <p:spPr>
+          <a:xfrm>
+            <a:off x="0" y="0"/>
+            <a:ext cx="9144000" cy="101501"/>
+          </a:xfrm>
+          <a:prstGeom prst="rect">
+            <a:avLst/>
+          </a:prstGeom>
+          <a:solidFill>
+            <a:srgbClr val="277884"/>
+          </a:solidFill>
+          <a:ln/>
+        </p:spPr>
+        <p:txBody>
+          <a:bodyPr wrap="square" rtlCol="0" anchor="ctr"/>
+          <a:lstStyle/>
+          <a:p>
+            <a:pPr indent="0" marL="0">
+              <a:buNone/>
+            </a:pPr>
+            <a:endParaRPr lang="en-US" dirty="0"/>
+          </a:p>
+        </p:txBody>
+      </p:sp>
+      <p:sp>
+        <p:nvSpPr>
+          <p:cNvPr id="3" name="Text 1"/>
+          <p:cNvSpPr/>
+          <p:nvPr/>
+        </p:nvSpPr>
+        <p:spPr>
+          <a:xfrm>
+            <a:off x="406301" y="457051"/>
+            <a:ext cx="8498026" cy="274290"/>
+          </a:xfrm>
+          <a:prstGeom prst="rect">
+            <a:avLst/>
+          </a:prstGeom>
+          <a:noFill/>
+          <a:ln/>
+        </p:spPr>
+        <p:txBody>
+          <a:bodyPr wrap="square" lIns="0" tIns="0" rIns="0" bIns="0" rtlCol="0" anchor="t"/>
+          <a:lstStyle/>
+          <a:p>
+            <a:pPr algn="l" indent="0" marL="0">
+              <a:lnSpc>
+                <a:spcPts val="2160"/>
+              </a:lnSpc>
+              <a:spcBef>
+                <a:spcPts val="600"/>
+              </a:spcBef>
+              <a:spcAft>
+                <a:spcPts val="800"/>
+              </a:spcAft>
+              <a:buNone/>
+            </a:pPr>
+            <a:r>
+              <a:rPr lang="en-US" sz="1800" b="1" dirty="0">
+                <a:solidFill>
+                  <a:srgbClr val="FE4447"/>
+                </a:solidFill>
+                <a:latin typeface="Georgia" pitchFamily="34" charset="0"/>
+                <a:ea typeface="Georgia" pitchFamily="34" charset="-122"/>
+                <a:cs typeface="Georgia" pitchFamily="34" charset="-120"/>
+              </a:rPr>
+              <a:t>Homework</a:t>
+            </a:r>
+            <a:endParaRPr lang="en-US" sz="1800" dirty="0"/>
+          </a:p>
+        </p:txBody>
+      </p:sp>
+      <p:sp>
+        <p:nvSpPr>
+          <p:cNvPr id="4" name="Text 2"/>
+          <p:cNvSpPr/>
+          <p:nvPr/>
+        </p:nvSpPr>
+        <p:spPr>
+          <a:xfrm>
+            <a:off x="634901" y="883593"/>
+            <a:ext cx="8102798" cy="487561"/>
+          </a:xfrm>
+          <a:prstGeom prst="rect">
+            <a:avLst/>
+          </a:prstGeom>
+          <a:noFill/>
+          <a:ln/>
+        </p:spPr>
+        <p:txBody>
+          <a:bodyPr wrap="square" lIns="0" tIns="0" rIns="0" bIns="0" rtlCol="0" anchor="t"/>
+          <a:lstStyle/>
+          <a:p>
+            <a:pPr algn="l" marL="342900" indent="-342900">
+              <a:lnSpc>
+                <a:spcPts val="1620"/>
+              </a:lnSpc>
+              <a:spcAft>
+                <a:spcPts val="300"/>
+              </a:spcAft>
+              <a:buSzPct val="100000"/>
+              <a:buChar char="•"/>
+            </a:pPr>
+            <a:r>
+              <a:rPr lang="en-US" sz="1200" dirty="0">
+                <a:solidFill>
+                  <a:srgbClr val="1C2833"/>
+                </a:solidFill>
+                <a:latin typeface="Arial" pitchFamily="34" charset="0"/>
+                <a:ea typeface="Arial" pitchFamily="34" charset="-122"/>
+                <a:cs typeface="Arial" pitchFamily="34" charset="-120"/>
+              </a:rPr>
+              <a:t>Look up ONE Sanskrit word in an online etymology resource. Note where it might appear in English vocabulary (e.g. </a:t>
+            </a:r>
+            <a:pPr algn="l" indent="0" marL="0">
+              <a:lnSpc>
+                <a:spcPts val="1620"/>
+              </a:lnSpc>
+              <a:spcAft>
+                <a:spcPts val="300"/>
+              </a:spcAft>
+              <a:buNone/>
+            </a:pPr>
+            <a:r>
+              <a:rPr lang="en-US" sz="1200" i="1" dirty="0">
+                <a:solidFill>
+                  <a:srgbClr val="1C2833"/>
+                </a:solidFill>
+                <a:latin typeface="Arial" pitchFamily="34" charset="0"/>
+                <a:ea typeface="Arial" pitchFamily="34" charset="-122"/>
+                <a:cs typeface="Arial" pitchFamily="34" charset="-120"/>
+              </a:rPr>
+              <a:t>mātṛ</a:t>
+            </a:r>
+            <a:pPr algn="l" indent="0" marL="0">
+              <a:lnSpc>
+                <a:spcPts val="1620"/>
+              </a:lnSpc>
+              <a:spcAft>
+                <a:spcPts val="300"/>
+              </a:spcAft>
+              <a:buNone/>
+            </a:pPr>
+            <a:r>
+              <a:rPr lang="en-US" sz="1200" dirty="0">
+                <a:solidFill>
+                  <a:srgbClr val="1C2833"/>
+                </a:solidFill>
+                <a:latin typeface="Arial" pitchFamily="34" charset="0"/>
+                <a:ea typeface="Arial" pitchFamily="34" charset="-122"/>
+                <a:cs typeface="Arial" pitchFamily="34" charset="-120"/>
+              </a:rPr>
+              <a:t> → mother). Bring tomorrow.</a:t>
+            </a:r>
+            <a:endParaRPr lang="en-US" sz="1200" dirty="0"/>
+          </a:p>
+        </p:txBody>
+      </p:sp>
+      <p:sp>
+        <p:nvSpPr>
+          <p:cNvPr id="5" name="Text 3"/>
+          <p:cNvSpPr/>
+          <p:nvPr/>
+        </p:nvSpPr>
+        <p:spPr>
+          <a:xfrm>
+            <a:off x="406301" y="4434929"/>
+            <a:ext cx="8498026" cy="213271"/>
+          </a:xfrm>
+          <a:prstGeom prst="rect">
+            <a:avLst/>
+          </a:prstGeom>
+          <a:noFill/>
+          <a:ln/>
+        </p:spPr>
+        <p:txBody>
+          <a:bodyPr wrap="square" lIns="0" tIns="0" rIns="0" bIns="0" rtlCol="0" anchor="t"/>
+          <a:lstStyle/>
+          <a:p>
+            <a:pPr algn="l" indent="0" marL="0">
+              <a:lnSpc>
+                <a:spcPts val="1680"/>
+              </a:lnSpc>
+              <a:spcBef>
+                <a:spcPts val="300"/>
+              </a:spcBef>
+              <a:spcAft>
+                <a:spcPts val="300"/>
+              </a:spcAft>
+              <a:buNone/>
+            </a:pPr>
+            <a:r>
+              <a:rPr lang="en-US" sz="1200" dirty="0">
+                <a:solidFill>
+                  <a:srgbClr val="1C2833"/>
+                </a:solidFill>
+                <a:latin typeface="Arial" pitchFamily="34" charset="0"/>
+                <a:ea typeface="Arial" pitchFamily="34" charset="-122"/>
+                <a:cs typeface="Arial" pitchFamily="34" charset="-120"/>
+              </a:rPr>
+              <a:t>Middle ·  · IKS Curriculum</a:t>
+            </a:r>
+            <a:endParaRPr lang="en-US" sz="1200" dirty="0"/>
+          </a:p>
+        </p:txBody>
+      </p:sp>
+    </p:spTree>
+  </p:cSld>
+  <p:clrMapOvr>
+    <a:masterClrMapping/>
+  </p:clrMapOvr>
+</p:sld>
+</file>
+
+<file path=ppt/slides/slide16.xml><?xml version="1.0" encoding="utf-8"?>
+<p:sld xmlns:a="http://schemas.openxmlformats.org/drawingml/2006/main" xmlns:r="http://schemas.openxmlformats.org/officeDocument/2006/relationships" xmlns:p="http://schemas.openxmlformats.org/presentationml/2006/main">
+  <p:cSld name="Slide 16">
+    <p:bg>
+      <p:bgPr>
+        <a:solidFill>
+          <a:srgbClr val="FFFFFF"/>
+        </a:solidFill>
+      </p:bgPr>
+    </p:bg>
+    <p:spTree>
+      <p:nvGrpSpPr>
+        <p:cNvPr id="1" name=""/>
+        <p:cNvGrpSpPr/>
+        <p:nvPr/>
+      </p:nvGrpSpPr>
+      <p:grpSpPr>
+        <a:xfrm>
+          <a:off x="0" y="0"/>
+          <a:ext cx="0" cy="0"/>
+          <a:chOff x="0" y="0"/>
+          <a:chExt cx="0" cy="0"/>
+        </a:xfrm>
+      </p:grpSpPr>
+      <p:sp>
+        <p:nvSpPr>
+          <p:cNvPr id="2" name="Text 0"/>
+          <p:cNvSpPr/>
+          <p:nvPr/>
+        </p:nvSpPr>
+        <p:spPr>
+          <a:xfrm>
+            <a:off x="0" y="0"/>
+            <a:ext cx="9144000" cy="101501"/>
+          </a:xfrm>
+          <a:prstGeom prst="rect">
+            <a:avLst/>
+          </a:prstGeom>
+          <a:solidFill>
+            <a:srgbClr val="277884"/>
+          </a:solidFill>
+          <a:ln/>
+        </p:spPr>
+        <p:txBody>
+          <a:bodyPr wrap="square" rtlCol="0" anchor="ctr"/>
+          <a:lstStyle/>
+          <a:p>
+            <a:pPr indent="0" marL="0">
+              <a:buNone/>
+            </a:pPr>
+            <a:endParaRPr lang="en-US" dirty="0"/>
+          </a:p>
+        </p:txBody>
+      </p:sp>
+      <p:sp>
+        <p:nvSpPr>
+          <p:cNvPr id="3" name="Text 1"/>
+          <p:cNvSpPr/>
+          <p:nvPr/>
+        </p:nvSpPr>
+        <p:spPr>
+          <a:xfrm>
+            <a:off x="406301" y="457051"/>
+            <a:ext cx="8498026" cy="274290"/>
+          </a:xfrm>
+          <a:prstGeom prst="rect">
+            <a:avLst/>
+          </a:prstGeom>
+          <a:noFill/>
+          <a:ln/>
+        </p:spPr>
+        <p:txBody>
+          <a:bodyPr wrap="square" lIns="0" tIns="0" rIns="0" bIns="0" rtlCol="0" anchor="t"/>
+          <a:lstStyle/>
+          <a:p>
+            <a:pPr algn="l" indent="0" marL="0">
+              <a:lnSpc>
+                <a:spcPts val="2160"/>
+              </a:lnSpc>
+              <a:spcBef>
+                <a:spcPts val="600"/>
+              </a:spcBef>
+              <a:spcAft>
+                <a:spcPts val="800"/>
+              </a:spcAft>
+              <a:buNone/>
+            </a:pPr>
+            <a:r>
+              <a:rPr lang="en-US" sz="1800" b="1" dirty="0">
+                <a:solidFill>
+                  <a:srgbClr val="FE4447"/>
+                </a:solidFill>
+                <a:latin typeface="Georgia" pitchFamily="34" charset="0"/>
+                <a:ea typeface="Georgia" pitchFamily="34" charset="-122"/>
+                <a:cs typeface="Georgia" pitchFamily="34" charset="-120"/>
+              </a:rPr>
+              <a:t>Differentiation</a:t>
+            </a:r>
+            <a:endParaRPr lang="en-US" sz="1800" dirty="0"/>
+          </a:p>
+        </p:txBody>
+      </p:sp>
+      <p:sp>
+        <p:nvSpPr>
+          <p:cNvPr id="4" name="Text 2"/>
+          <p:cNvSpPr/>
+          <p:nvPr/>
+        </p:nvSpPr>
+        <p:spPr>
+          <a:xfrm>
+            <a:off x="634901" y="883593"/>
+            <a:ext cx="8102798" cy="731341"/>
+          </a:xfrm>
+          <a:prstGeom prst="rect">
+            <a:avLst/>
+          </a:prstGeom>
+          <a:noFill/>
+          <a:ln/>
+        </p:spPr>
+        <p:txBody>
+          <a:bodyPr wrap="square" lIns="0" tIns="0" rIns="0" bIns="0" rtlCol="0" anchor="t"/>
+          <a:lstStyle/>
+          <a:p>
+            <a:pPr algn="l" marL="342900" indent="-342900">
+              <a:lnSpc>
+                <a:spcPts val="1620"/>
+              </a:lnSpc>
+              <a:spcAft>
+                <a:spcPts val="300"/>
+              </a:spcAft>
+              <a:buSzPct val="100000"/>
+              <a:buChar char="•"/>
+            </a:pPr>
+            <a:r>
+              <a:rPr lang="en-US" sz="1200" b="1" dirty="0">
+                <a:solidFill>
+                  <a:srgbClr val="1C2833"/>
+                </a:solidFill>
+                <a:latin typeface="Arial" pitchFamily="34" charset="0"/>
+                <a:ea typeface="Arial" pitchFamily="34" charset="-122"/>
+                <a:cs typeface="Arial" pitchFamily="34" charset="-120"/>
+              </a:rPr>
+              <a:t>Tier up:</a:t>
+            </a:r>
+            <a:pPr algn="l" indent="0" marL="0">
+              <a:lnSpc>
+                <a:spcPts val="1620"/>
+              </a:lnSpc>
+              <a:spcAft>
+                <a:spcPts val="300"/>
+              </a:spcAft>
+              <a:buNone/>
+            </a:pPr>
+            <a:r>
+              <a:rPr lang="en-US" sz="1200" dirty="0">
+                <a:solidFill>
+                  <a:srgbClr val="1C2833"/>
+                </a:solidFill>
+                <a:latin typeface="Arial" pitchFamily="34" charset="0"/>
+                <a:ea typeface="Arial" pitchFamily="34" charset="-122"/>
+                <a:cs typeface="Arial" pitchFamily="34" charset="-120"/>
+              </a:rPr>
+              <a:t> Read about the Chomsky-Pāṇini connection — find 1 specific example of Pāṇinian influence on modern linguistics.</a:t>
+            </a:r>
+            <a:endParaRPr lang="en-US" sz="1200" dirty="0"/>
+          </a:p>
+          <a:p>
+            <a:pPr algn="l" marL="342900" indent="-342900">
+              <a:lnSpc>
+                <a:spcPts val="1620"/>
+              </a:lnSpc>
+              <a:spcAft>
+                <a:spcPts val="300"/>
+              </a:spcAft>
+              <a:buSzPct val="100000"/>
+              <a:buChar char="•"/>
+            </a:pPr>
+            <a:r>
+              <a:rPr lang="en-US" sz="1200" b="1" dirty="0">
+                <a:solidFill>
+                  <a:srgbClr val="1C2833"/>
+                </a:solidFill>
+                <a:latin typeface="Arial" pitchFamily="34" charset="0"/>
+                <a:ea typeface="Arial" pitchFamily="34" charset="-122"/>
+                <a:cs typeface="Arial" pitchFamily="34" charset="-120"/>
+              </a:rPr>
+              <a:t>Tier down:</a:t>
+            </a:r>
+            <a:pPr algn="l" indent="0" marL="0">
+              <a:lnSpc>
+                <a:spcPts val="1620"/>
+              </a:lnSpc>
+              <a:spcAft>
+                <a:spcPts val="300"/>
+              </a:spcAft>
+              <a:buNone/>
+            </a:pPr>
+            <a:r>
+              <a:rPr lang="en-US" sz="1200" dirty="0">
+                <a:solidFill>
+                  <a:srgbClr val="1C2833"/>
+                </a:solidFill>
+                <a:latin typeface="Arial" pitchFamily="34" charset="0"/>
+                <a:ea typeface="Arial" pitchFamily="34" charset="-122"/>
+                <a:cs typeface="Arial" pitchFamily="34" charset="-120"/>
+              </a:rPr>
+              <a:t> Memorise just 3 Vedāṅgas: Vyākaraṇa, Jyotiṣa, Kalpa.</a:t>
+            </a:r>
+            <a:endParaRPr lang="en-US" sz="1200" dirty="0"/>
+          </a:p>
+        </p:txBody>
+      </p:sp>
+      <p:sp>
+        <p:nvSpPr>
+          <p:cNvPr id="5" name="Text 3"/>
+          <p:cNvSpPr/>
+          <p:nvPr/>
+        </p:nvSpPr>
+        <p:spPr>
+          <a:xfrm>
+            <a:off x="406301" y="4434929"/>
+            <a:ext cx="8498026" cy="213271"/>
+          </a:xfrm>
+          <a:prstGeom prst="rect">
+            <a:avLst/>
+          </a:prstGeom>
+          <a:noFill/>
+          <a:ln/>
+        </p:spPr>
+        <p:txBody>
+          <a:bodyPr wrap="square" lIns="0" tIns="0" rIns="0" bIns="0" rtlCol="0" anchor="t"/>
+          <a:lstStyle/>
+          <a:p>
+            <a:pPr algn="l" indent="0" marL="0">
+              <a:lnSpc>
+                <a:spcPts val="1680"/>
+              </a:lnSpc>
+              <a:spcBef>
+                <a:spcPts val="300"/>
+              </a:spcBef>
+              <a:spcAft>
+                <a:spcPts val="300"/>
+              </a:spcAft>
+              <a:buNone/>
+            </a:pPr>
+            <a:r>
+              <a:rPr lang="en-US" sz="1200" dirty="0">
+                <a:solidFill>
+                  <a:srgbClr val="1C2833"/>
+                </a:solidFill>
+                <a:latin typeface="Arial" pitchFamily="34" charset="0"/>
+                <a:ea typeface="Arial" pitchFamily="34" charset="-122"/>
+                <a:cs typeface="Arial" pitchFamily="34" charset="-120"/>
+              </a:rPr>
+              <a:t>Middle ·  · IKS Curriculum</a:t>
+            </a:r>
+            <a:endParaRPr lang="en-US" sz="1200" dirty="0"/>
+          </a:p>
+        </p:txBody>
+      </p:sp>
+    </p:spTree>
+  </p:cSld>
+  <p:clrMapOvr>
+    <a:masterClrMapping/>
+  </p:clrMapOvr>
+</p:sld>
+</file>
+
+<file path=ppt/slides/slide17.xml><?xml version="1.0" encoding="utf-8"?>
+<p:sld xmlns:a="http://schemas.openxmlformats.org/drawingml/2006/main" xmlns:r="http://schemas.openxmlformats.org/officeDocument/2006/relationships" xmlns:p="http://schemas.openxmlformats.org/presentationml/2006/main">
+  <p:cSld name="Slide 17">
+    <p:bg>
+      <p:bgPr>
+        <a:solidFill>
+          <a:srgbClr val="FFFFFF"/>
+        </a:solidFill>
+      </p:bgPr>
+    </p:bg>
+    <p:spTree>
+      <p:nvGrpSpPr>
+        <p:cNvPr id="1" name=""/>
+        <p:cNvGrpSpPr/>
+        <p:nvPr/>
+      </p:nvGrpSpPr>
+      <p:grpSpPr>
+        <a:xfrm>
+          <a:off x="0" y="0"/>
+          <a:ext cx="0" cy="0"/>
+          <a:chOff x="0" y="0"/>
+          <a:chExt cx="0" cy="0"/>
+        </a:xfrm>
+      </p:grpSpPr>
+      <p:sp>
+        <p:nvSpPr>
+          <p:cNvPr id="2" name="Text 0"/>
+          <p:cNvSpPr/>
+          <p:nvPr/>
+        </p:nvSpPr>
+        <p:spPr>
+          <a:xfrm>
+            <a:off x="0" y="0"/>
+            <a:ext cx="9144000" cy="101501"/>
+          </a:xfrm>
+          <a:prstGeom prst="rect">
+            <a:avLst/>
+          </a:prstGeom>
+          <a:solidFill>
+            <a:srgbClr val="277884"/>
+          </a:solidFill>
+          <a:ln/>
+        </p:spPr>
+        <p:txBody>
+          <a:bodyPr wrap="square" rtlCol="0" anchor="ctr"/>
+          <a:lstStyle/>
+          <a:p>
+            <a:pPr indent="0" marL="0">
+              <a:buNone/>
+            </a:pPr>
+            <a:endParaRPr lang="en-US" dirty="0"/>
+          </a:p>
+        </p:txBody>
+      </p:sp>
+      <p:sp>
+        <p:nvSpPr>
+          <p:cNvPr id="3" name="Text 1"/>
+          <p:cNvSpPr/>
+          <p:nvPr/>
+        </p:nvSpPr>
+        <p:spPr>
+          <a:xfrm>
+            <a:off x="406301" y="457051"/>
+            <a:ext cx="8498026" cy="274290"/>
+          </a:xfrm>
+          <a:prstGeom prst="rect">
+            <a:avLst/>
+          </a:prstGeom>
+          <a:noFill/>
+          <a:ln/>
+        </p:spPr>
+        <p:txBody>
+          <a:bodyPr wrap="square" lIns="0" tIns="0" rIns="0" bIns="0" rtlCol="0" anchor="t"/>
+          <a:lstStyle/>
+          <a:p>
+            <a:pPr algn="l" indent="0" marL="0">
+              <a:lnSpc>
+                <a:spcPts val="2160"/>
+              </a:lnSpc>
+              <a:spcBef>
+                <a:spcPts val="600"/>
+              </a:spcBef>
+              <a:spcAft>
+                <a:spcPts val="800"/>
+              </a:spcAft>
+              <a:buNone/>
+            </a:pPr>
+            <a:r>
+              <a:rPr lang="en-US" sz="1800" b="1" dirty="0">
+                <a:solidFill>
+                  <a:srgbClr val="FE4447"/>
+                </a:solidFill>
+                <a:latin typeface="Georgia" pitchFamily="34" charset="0"/>
+                <a:ea typeface="Georgia" pitchFamily="34" charset="-122"/>
+                <a:cs typeface="Georgia" pitchFamily="34" charset="-120"/>
+              </a:rPr>
+              <a:t>Teacher notes</a:t>
+            </a:r>
+            <a:endParaRPr lang="en-US" sz="1800" dirty="0"/>
+          </a:p>
+        </p:txBody>
+      </p:sp>
+      <p:sp>
+        <p:nvSpPr>
+          <p:cNvPr id="4" name="Text 2"/>
+          <p:cNvSpPr/>
+          <p:nvPr/>
+        </p:nvSpPr>
+        <p:spPr>
+          <a:xfrm>
+            <a:off x="634901" y="883593"/>
+            <a:ext cx="8102798" cy="731341"/>
+          </a:xfrm>
+          <a:prstGeom prst="rect">
+            <a:avLst/>
+          </a:prstGeom>
+          <a:noFill/>
+          <a:ln/>
+        </p:spPr>
+        <p:txBody>
+          <a:bodyPr wrap="square" lIns="0" tIns="0" rIns="0" bIns="0" rtlCol="0" anchor="t"/>
+          <a:lstStyle/>
+          <a:p>
+            <a:pPr algn="l" marL="342900" indent="-342900">
+              <a:lnSpc>
+                <a:spcPts val="1620"/>
+              </a:lnSpc>
+              <a:spcAft>
+                <a:spcPts val="300"/>
+              </a:spcAft>
+              <a:buSzPct val="100000"/>
+              <a:buChar char="•"/>
+            </a:pPr>
+            <a:r>
+              <a:rPr lang="en-US" sz="1200" dirty="0">
+                <a:solidFill>
+                  <a:srgbClr val="1C2833"/>
+                </a:solidFill>
+                <a:latin typeface="Arial" pitchFamily="34" charset="0"/>
+                <a:ea typeface="Arial" pitchFamily="34" charset="-122"/>
+                <a:cs typeface="Arial" pitchFamily="34" charset="-120"/>
+              </a:rPr>
+              <a:t>Students often confuse Jyotiṣa with horoscope-astrology. Distinguish: the discipline contained BOTH planetary calculation AND interpretive use. Modern science separates these.</a:t>
+            </a:r>
+            <a:endParaRPr lang="en-US" sz="1200" dirty="0"/>
+          </a:p>
+          <a:p>
+            <a:pPr algn="l" marL="342900" indent="-342900">
+              <a:lnSpc>
+                <a:spcPts val="1620"/>
+              </a:lnSpc>
+              <a:spcAft>
+                <a:spcPts val="300"/>
+              </a:spcAft>
+              <a:buSzPct val="100000"/>
+              <a:buChar char="•"/>
+            </a:pPr>
+            <a:r>
+              <a:rPr lang="en-US" sz="1200" dirty="0">
+                <a:solidFill>
+                  <a:srgbClr val="1C2833"/>
+                </a:solidFill>
+                <a:latin typeface="Arial" pitchFamily="34" charset="0"/>
+                <a:ea typeface="Arial" pitchFamily="34" charset="-122"/>
+                <a:cs typeface="Arial" pitchFamily="34" charset="-120"/>
+              </a:rPr>
+              <a:t>The "first formal grammar" claim about Pāṇini is mainstream scholarly view (Cardona, Kiparsky, etc.). Defensible.</a:t>
+            </a:r>
+            <a:endParaRPr lang="en-US" sz="1200" dirty="0"/>
+          </a:p>
+        </p:txBody>
+      </p:sp>
+      <p:sp>
+        <p:nvSpPr>
+          <p:cNvPr id="5" name="Text 3"/>
+          <p:cNvSpPr/>
+          <p:nvPr/>
+        </p:nvSpPr>
+        <p:spPr>
+          <a:xfrm>
+            <a:off x="406301" y="4434929"/>
+            <a:ext cx="8498026" cy="213271"/>
+          </a:xfrm>
+          <a:prstGeom prst="rect">
+            <a:avLst/>
+          </a:prstGeom>
+          <a:noFill/>
+          <a:ln/>
+        </p:spPr>
+        <p:txBody>
+          <a:bodyPr wrap="square" lIns="0" tIns="0" rIns="0" bIns="0" rtlCol="0" anchor="t"/>
+          <a:lstStyle/>
+          <a:p>
+            <a:pPr algn="l" indent="0" marL="0">
+              <a:lnSpc>
+                <a:spcPts val="1680"/>
+              </a:lnSpc>
+              <a:spcBef>
+                <a:spcPts val="300"/>
+              </a:spcBef>
+              <a:spcAft>
+                <a:spcPts val="300"/>
+              </a:spcAft>
+              <a:buNone/>
+            </a:pPr>
+            <a:r>
+              <a:rPr lang="en-US" sz="1200" dirty="0">
+                <a:solidFill>
+                  <a:srgbClr val="1C2833"/>
+                </a:solidFill>
+                <a:latin typeface="Arial" pitchFamily="34" charset="0"/>
+                <a:ea typeface="Arial" pitchFamily="34" charset="-122"/>
+                <a:cs typeface="Arial" pitchFamily="34" charset="-120"/>
+              </a:rPr>
+              <a:t>Middle ·  · IKS Curriculum</a:t>
+            </a:r>
+            <a:endParaRPr lang="en-US" sz="1200" dirty="0"/>
+          </a:p>
+        </p:txBody>
+      </p:sp>
+    </p:spTree>
+  </p:cSld>
+  <p:clrMapOvr>
+    <a:masterClrMapping/>
+  </p:clrMapOvr>
+</p:sld>
+</file>
+
+<file path=ppt/slides/slide18.xml><?xml version="1.0" encoding="utf-8"?>
+<p:sld xmlns:a="http://schemas.openxmlformats.org/drawingml/2006/main" xmlns:r="http://schemas.openxmlformats.org/officeDocument/2006/relationships" xmlns:p="http://schemas.openxmlformats.org/presentationml/2006/main">
+  <p:cSld name="Slide 18">
+    <p:bg>
+      <p:bgPr>
+        <a:solidFill>
+          <a:srgbClr val="FFFFFF"/>
+        </a:solidFill>
+      </p:bgPr>
+    </p:bg>
+    <p:spTree>
+      <p:nvGrpSpPr>
+        <p:cNvPr id="1" name=""/>
+        <p:cNvGrpSpPr/>
+        <p:nvPr/>
+      </p:nvGrpSpPr>
+      <p:grpSpPr>
+        <a:xfrm>
+          <a:off x="0" y="0"/>
+          <a:ext cx="0" cy="0"/>
+          <a:chOff x="0" y="0"/>
+          <a:chExt cx="0" cy="0"/>
+        </a:xfrm>
+      </p:grpSpPr>
+      <p:sp>
+        <p:nvSpPr>
+          <p:cNvPr id="2" name="Text 0"/>
+          <p:cNvSpPr/>
+          <p:nvPr/>
+        </p:nvSpPr>
+        <p:spPr>
+          <a:xfrm>
+            <a:off x="0" y="0"/>
+            <a:ext cx="9144000" cy="101501"/>
+          </a:xfrm>
+          <a:prstGeom prst="rect">
+            <a:avLst/>
+          </a:prstGeom>
+          <a:solidFill>
+            <a:srgbClr val="277884"/>
+          </a:solidFill>
+          <a:ln/>
+        </p:spPr>
+        <p:txBody>
+          <a:bodyPr wrap="square" rtlCol="0" anchor="ctr"/>
+          <a:lstStyle/>
+          <a:p>
+            <a:pPr indent="0" marL="0">
+              <a:buNone/>
+            </a:pPr>
+            <a:endParaRPr lang="en-US" dirty="0"/>
+          </a:p>
+        </p:txBody>
+      </p:sp>
+      <p:sp>
+        <p:nvSpPr>
+          <p:cNvPr id="3" name="Text 1"/>
+          <p:cNvSpPr/>
+          <p:nvPr/>
+        </p:nvSpPr>
+        <p:spPr>
+          <a:xfrm>
+            <a:off x="406301" y="457051"/>
+            <a:ext cx="8498026" cy="274290"/>
+          </a:xfrm>
+          <a:prstGeom prst="rect">
+            <a:avLst/>
+          </a:prstGeom>
+          <a:noFill/>
+          <a:ln/>
+        </p:spPr>
+        <p:txBody>
+          <a:bodyPr wrap="square" lIns="0" tIns="0" rIns="0" bIns="0" rtlCol="0" anchor="t"/>
+          <a:lstStyle/>
+          <a:p>
+            <a:pPr algn="l" indent="0" marL="0">
+              <a:lnSpc>
+                <a:spcPts val="2160"/>
+              </a:lnSpc>
+              <a:spcBef>
+                <a:spcPts val="600"/>
+              </a:spcBef>
+              <a:spcAft>
+                <a:spcPts val="800"/>
+              </a:spcAft>
+              <a:buNone/>
+            </a:pPr>
+            <a:r>
+              <a:rPr lang="en-US" sz="1800" b="1" dirty="0">
+                <a:solidFill>
+                  <a:srgbClr val="FE4447"/>
+                </a:solidFill>
+                <a:latin typeface="Georgia" pitchFamily="34" charset="0"/>
+                <a:ea typeface="Georgia" pitchFamily="34" charset="-122"/>
+                <a:cs typeface="Georgia" pitchFamily="34" charset="-120"/>
+              </a:rPr>
+              <a:t>Citation(s) used</a:t>
+            </a:r>
+            <a:endParaRPr lang="en-US" sz="1800" dirty="0"/>
+          </a:p>
+        </p:txBody>
+      </p:sp>
+      <p:sp>
+        <p:nvSpPr>
+          <p:cNvPr id="4" name="Text 2"/>
+          <p:cNvSpPr/>
+          <p:nvPr/>
+        </p:nvSpPr>
+        <p:spPr>
+          <a:xfrm>
+            <a:off x="634901" y="883593"/>
+            <a:ext cx="8102798" cy="525661"/>
+          </a:xfrm>
+          <a:prstGeom prst="rect">
+            <a:avLst/>
+          </a:prstGeom>
+          <a:noFill/>
+          <a:ln/>
+        </p:spPr>
+        <p:txBody>
+          <a:bodyPr wrap="square" lIns="0" tIns="0" rIns="0" bIns="0" rtlCol="0" anchor="t"/>
+          <a:lstStyle/>
+          <a:p>
+            <a:pPr algn="l" marL="342900" indent="-342900">
+              <a:lnSpc>
+                <a:spcPts val="1620"/>
+              </a:lnSpc>
+              <a:spcAft>
+                <a:spcPts val="300"/>
+              </a:spcAft>
+              <a:buSzPct val="100000"/>
+              <a:buChar char="•"/>
+            </a:pPr>
+            <a:r>
+              <a:rPr lang="en-US" sz="1200" dirty="0">
+                <a:solidFill>
+                  <a:srgbClr val="1C2833"/>
+                </a:solidFill>
+                <a:latin typeface="Arial" pitchFamily="34" charset="0"/>
+                <a:ea typeface="Arial" pitchFamily="34" charset="-122"/>
+                <a:cs typeface="Arial" pitchFamily="34" charset="-120"/>
+              </a:rPr>
+              <a:t>Pollock (2006) on Vedic disciplines.</a:t>
+            </a:r>
+            <a:endParaRPr lang="en-US" sz="1200" dirty="0"/>
+          </a:p>
+          <a:p>
+            <a:pPr algn="l" marL="342900" indent="-342900">
+              <a:lnSpc>
+                <a:spcPts val="1620"/>
+              </a:lnSpc>
+              <a:spcAft>
+                <a:spcPts val="300"/>
+              </a:spcAft>
+              <a:buSzPct val="100000"/>
+              <a:buChar char="•"/>
+            </a:pPr>
+            <a:r>
+              <a:rPr lang="en-US" sz="1200" dirty="0">
+                <a:solidFill>
+                  <a:srgbClr val="1C2833"/>
+                </a:solidFill>
+                <a:latin typeface="Arial" pitchFamily="34" charset="0"/>
+                <a:ea typeface="Arial" pitchFamily="34" charset="-122"/>
+                <a:cs typeface="Arial" pitchFamily="34" charset="-120"/>
+              </a:rPr>
+              <a:t>Cardona, G. (1997). </a:t>
+            </a:r>
+            <a:pPr algn="l" indent="0" marL="0">
+              <a:lnSpc>
+                <a:spcPts val="1620"/>
+              </a:lnSpc>
+              <a:spcAft>
+                <a:spcPts val="300"/>
+              </a:spcAft>
+              <a:buNone/>
+            </a:pPr>
+            <a:r>
+              <a:rPr lang="en-US" sz="1200" i="1" dirty="0">
+                <a:solidFill>
+                  <a:srgbClr val="1C2833"/>
+                </a:solidFill>
+                <a:latin typeface="Arial" pitchFamily="34" charset="0"/>
+                <a:ea typeface="Arial" pitchFamily="34" charset="-122"/>
+                <a:cs typeface="Arial" pitchFamily="34" charset="-120"/>
+              </a:rPr>
               <a:t>Pāṇini: His Work and Its Traditions</a:t>
             </a:r>
             <a:pPr algn="l" indent="0" marL="0">
               <a:lnSpc>
-                <a:spcPts val="1680"/>
-              </a:lnSpc>
-              <a:spcBef>
-                <a:spcPts val="300"/>
-              </a:spcBef>
+                <a:spcPts val="1620"/>
+              </a:lnSpc>
               <a:spcAft>
                 <a:spcPts val="300"/>
               </a:spcAft>
@@ -3020,7 +5307,7 @@
                 <a:ea typeface="Georgia" pitchFamily="34" charset="-122"/>
                 <a:cs typeface="Georgia" pitchFamily="34" charset="-120"/>
               </a:rPr>
-              <a:t>Materials</a:t>
+              <a:t>Learning objective</a:t>
             </a:r>
             <a:endParaRPr lang="en-US" sz="1800" dirty="0"/>
           </a:p>
@@ -3035,7 +5322,7 @@
         <p:spPr>
           <a:xfrm>
             <a:off x="406301" y="870942"/>
-            <a:ext cx="8498026" cy="213271"/>
+            <a:ext cx="8498026" cy="426541"/>
           </a:xfrm>
           <a:prstGeom prst="rect">
             <a:avLst/>
@@ -3068,7 +5355,7 @@
                 <a:ea typeface="Arial" pitchFamily="34" charset="-122"/>
                 <a:cs typeface="Arial" pitchFamily="34" charset="-120"/>
               </a:rPr>
-              <a:t>– Whiteboard – Matching-game cards (6 names + 6 functions, shuffled)</a:t>
+              <a:t>Students name the six Vedāṅgas (auxiliary disciplines) and match each to its function in preserving and applying Vedic knowledge.</a:t>
             </a:r>
             <a:endParaRPr lang="en-US" sz="1200" dirty="0"/>
           </a:p>
@@ -3226,7 +5513,7 @@
                 <a:ea typeface="Georgia" pitchFamily="34" charset="-122"/>
                 <a:cs typeface="Georgia" pitchFamily="34" charset="-120"/>
               </a:rPr>
-              <a:t>Vocabulary</a:t>
+              <a:t>Materials</a:t>
             </a:r>
             <a:endParaRPr lang="en-US" sz="1800" dirty="0"/>
           </a:p>
@@ -3241,7 +5528,7 @@
         <p:spPr>
           <a:xfrm>
             <a:off x="634901" y="883593"/>
-            <a:ext cx="8102798" cy="769441"/>
+            <a:ext cx="8102798" cy="525661"/>
           </a:xfrm>
           <a:prstGeom prst="rect">
             <a:avLst/>
@@ -3264,26 +5551,6 @@
               <a:buChar char="•"/>
             </a:pPr>
             <a:r>
-              <a:rPr lang="en-US" sz="1200" i="1" dirty="0">
-                <a:solidFill>
-                  <a:srgbClr val="1C2833"/>
-                </a:solidFill>
-                <a:latin typeface="Arial" pitchFamily="34" charset="0"/>
-                <a:ea typeface="Arial" pitchFamily="34" charset="-122"/>
-                <a:cs typeface="Arial" pitchFamily="34" charset="-120"/>
-              </a:rPr>
-              <a:t>Vedāṅga</a:t>
-            </a:r>
-            <a:pPr algn="l" indent="0" marL="0">
-              <a:lnSpc>
-                <a:spcPts val="1620"/>
-              </a:lnSpc>
-              <a:spcAft>
-                <a:spcPts val="300"/>
-              </a:spcAft>
-              <a:buNone/>
-            </a:pPr>
-            <a:r>
               <a:rPr lang="en-US" sz="1200" dirty="0">
                 <a:solidFill>
                   <a:srgbClr val="1C2833"/>
@@ -3292,7 +5559,7 @@
                 <a:ea typeface="Arial" pitchFamily="34" charset="-122"/>
                 <a:cs typeface="Arial" pitchFamily="34" charset="-120"/>
               </a:rPr>
-              <a:t> — "limb of the Veda"</a:t>
+              <a:t>Whiteboard</a:t>
             </a:r>
             <a:endParaRPr lang="en-US" sz="1200" dirty="0"/>
           </a:p>
@@ -3308,26 +5575,6 @@
               <a:buChar char="•"/>
             </a:pPr>
             <a:r>
-              <a:rPr lang="en-US" sz="1200" i="1" dirty="0">
-                <a:solidFill>
-                  <a:srgbClr val="1C2833"/>
-                </a:solidFill>
-                <a:latin typeface="Arial" pitchFamily="34" charset="0"/>
-                <a:ea typeface="Arial" pitchFamily="34" charset="-122"/>
-                <a:cs typeface="Arial" pitchFamily="34" charset="-120"/>
-              </a:rPr>
-              <a:t>vyākaraṇa</a:t>
-            </a:r>
-            <a:pPr algn="l" indent="0" marL="0">
-              <a:lnSpc>
-                <a:spcPts val="1620"/>
-              </a:lnSpc>
-              <a:spcAft>
-                <a:spcPts val="300"/>
-              </a:spcAft>
-              <a:buNone/>
-            </a:pPr>
-            <a:r>
               <a:rPr lang="en-US" sz="1200" dirty="0">
                 <a:solidFill>
                   <a:srgbClr val="1C2833"/>
@@ -3336,51 +5583,7 @@
                 <a:ea typeface="Arial" pitchFamily="34" charset="-122"/>
                 <a:cs typeface="Arial" pitchFamily="34" charset="-120"/>
               </a:rPr>
-              <a:t> — "grammar; analysis"</a:t>
-            </a:r>
-            <a:endParaRPr lang="en-US" sz="1200" dirty="0"/>
-          </a:p>
-          <a:p>
-            <a:pPr algn="l" marL="342900" indent="-342900">
-              <a:lnSpc>
-                <a:spcPts val="1620"/>
-              </a:lnSpc>
-              <a:spcAft>
-                <a:spcPts val="300"/>
-              </a:spcAft>
-              <a:buSzPct val="100000"/>
-              <a:buChar char="•"/>
-            </a:pPr>
-            <a:r>
-              <a:rPr lang="en-US" sz="1200" i="1" dirty="0">
-                <a:solidFill>
-                  <a:srgbClr val="1C2833"/>
-                </a:solidFill>
-                <a:latin typeface="Arial" pitchFamily="34" charset="0"/>
-                <a:ea typeface="Arial" pitchFamily="34" charset="-122"/>
-                <a:cs typeface="Arial" pitchFamily="34" charset="-120"/>
-              </a:rPr>
-              <a:t>jyotiṣa</a:t>
-            </a:r>
-            <a:pPr algn="l" indent="0" marL="0">
-              <a:lnSpc>
-                <a:spcPts val="1620"/>
-              </a:lnSpc>
-              <a:spcAft>
-                <a:spcPts val="300"/>
-              </a:spcAft>
-              <a:buNone/>
-            </a:pPr>
-            <a:r>
-              <a:rPr lang="en-US" sz="1200" dirty="0">
-                <a:solidFill>
-                  <a:srgbClr val="1C2833"/>
-                </a:solidFill>
-                <a:latin typeface="Arial" pitchFamily="34" charset="0"/>
-                <a:ea typeface="Arial" pitchFamily="34" charset="-122"/>
-                <a:cs typeface="Arial" pitchFamily="34" charset="-120"/>
-              </a:rPr>
-              <a:t> — "luminary; astronomy/astrology"</a:t>
+              <a:t>Matching-game cards (6 names + 6 functions, shuffled)</a:t>
             </a:r>
             <a:endParaRPr lang="en-US" sz="1200" dirty="0"/>
           </a:p>
@@ -3538,7 +5741,7 @@
                 <a:ea typeface="Georgia" pitchFamily="34" charset="-122"/>
                 <a:cs typeface="Georgia" pitchFamily="34" charset="-120"/>
               </a:rPr>
-              <a:t>Flow</a:t>
+              <a:t>Vocabulary</a:t>
             </a:r>
             <a:endParaRPr lang="en-US" sz="1800" dirty="0"/>
           </a:p>
@@ -3547,6 +5750,160 @@
       <p:sp>
         <p:nvSpPr>
           <p:cNvPr id="4" name="Text 2"/>
+          <p:cNvSpPr/>
+          <p:nvPr/>
+        </p:nvSpPr>
+        <p:spPr>
+          <a:xfrm>
+            <a:off x="634901" y="883593"/>
+            <a:ext cx="8102798" cy="769441"/>
+          </a:xfrm>
+          <a:prstGeom prst="rect">
+            <a:avLst/>
+          </a:prstGeom>
+          <a:noFill/>
+          <a:ln/>
+        </p:spPr>
+        <p:txBody>
+          <a:bodyPr wrap="square" lIns="0" tIns="0" rIns="0" bIns="0" rtlCol="0" anchor="t"/>
+          <a:lstStyle/>
+          <a:p>
+            <a:pPr algn="l" marL="342900" indent="-342900">
+              <a:lnSpc>
+                <a:spcPts val="1620"/>
+              </a:lnSpc>
+              <a:spcAft>
+                <a:spcPts val="300"/>
+              </a:spcAft>
+              <a:buSzPct val="100000"/>
+              <a:buChar char="•"/>
+            </a:pPr>
+            <a:r>
+              <a:rPr lang="en-US" sz="1200" i="1" dirty="0">
+                <a:solidFill>
+                  <a:srgbClr val="1C2833"/>
+                </a:solidFill>
+                <a:latin typeface="Arial" pitchFamily="34" charset="0"/>
+                <a:ea typeface="Arial" pitchFamily="34" charset="-122"/>
+                <a:cs typeface="Arial" pitchFamily="34" charset="-120"/>
+              </a:rPr>
+              <a:t>Vedāṅga</a:t>
+            </a:r>
+            <a:pPr algn="l" indent="0" marL="0">
+              <a:lnSpc>
+                <a:spcPts val="1620"/>
+              </a:lnSpc>
+              <a:spcAft>
+                <a:spcPts val="300"/>
+              </a:spcAft>
+              <a:buNone/>
+            </a:pPr>
+            <a:r>
+              <a:rPr lang="en-US" sz="1200" dirty="0">
+                <a:solidFill>
+                  <a:srgbClr val="1C2833"/>
+                </a:solidFill>
+                <a:latin typeface="Arial" pitchFamily="34" charset="0"/>
+                <a:ea typeface="Arial" pitchFamily="34" charset="-122"/>
+                <a:cs typeface="Arial" pitchFamily="34" charset="-120"/>
+              </a:rPr>
+              <a:t> — "limb of the Veda"</a:t>
+            </a:r>
+            <a:endParaRPr lang="en-US" sz="1200" dirty="0"/>
+          </a:p>
+          <a:p>
+            <a:pPr algn="l" marL="342900" indent="-342900">
+              <a:lnSpc>
+                <a:spcPts val="1620"/>
+              </a:lnSpc>
+              <a:spcAft>
+                <a:spcPts val="300"/>
+              </a:spcAft>
+              <a:buSzPct val="100000"/>
+              <a:buChar char="•"/>
+            </a:pPr>
+            <a:r>
+              <a:rPr lang="en-US" sz="1200" i="1" dirty="0">
+                <a:solidFill>
+                  <a:srgbClr val="1C2833"/>
+                </a:solidFill>
+                <a:latin typeface="Arial" pitchFamily="34" charset="0"/>
+                <a:ea typeface="Arial" pitchFamily="34" charset="-122"/>
+                <a:cs typeface="Arial" pitchFamily="34" charset="-120"/>
+              </a:rPr>
+              <a:t>vyākaraṇa</a:t>
+            </a:r>
+            <a:pPr algn="l" indent="0" marL="0">
+              <a:lnSpc>
+                <a:spcPts val="1620"/>
+              </a:lnSpc>
+              <a:spcAft>
+                <a:spcPts val="300"/>
+              </a:spcAft>
+              <a:buNone/>
+            </a:pPr>
+            <a:r>
+              <a:rPr lang="en-US" sz="1200" dirty="0">
+                <a:solidFill>
+                  <a:srgbClr val="1C2833"/>
+                </a:solidFill>
+                <a:latin typeface="Arial" pitchFamily="34" charset="0"/>
+                <a:ea typeface="Arial" pitchFamily="34" charset="-122"/>
+                <a:cs typeface="Arial" pitchFamily="34" charset="-120"/>
+              </a:rPr>
+              <a:t> — "grammar; analysis"</a:t>
+            </a:r>
+            <a:endParaRPr lang="en-US" sz="1200" dirty="0"/>
+          </a:p>
+          <a:p>
+            <a:pPr algn="l" marL="342900" indent="-342900">
+              <a:lnSpc>
+                <a:spcPts val="1620"/>
+              </a:lnSpc>
+              <a:spcAft>
+                <a:spcPts val="300"/>
+              </a:spcAft>
+              <a:buSzPct val="100000"/>
+              <a:buChar char="•"/>
+            </a:pPr>
+            <a:r>
+              <a:rPr lang="en-US" sz="1200" i="1" dirty="0">
+                <a:solidFill>
+                  <a:srgbClr val="1C2833"/>
+                </a:solidFill>
+                <a:latin typeface="Arial" pitchFamily="34" charset="0"/>
+                <a:ea typeface="Arial" pitchFamily="34" charset="-122"/>
+                <a:cs typeface="Arial" pitchFamily="34" charset="-120"/>
+              </a:rPr>
+              <a:t>jyotiṣa</a:t>
+            </a:r>
+            <a:pPr algn="l" indent="0" marL="0">
+              <a:lnSpc>
+                <a:spcPts val="1620"/>
+              </a:lnSpc>
+              <a:spcAft>
+                <a:spcPts val="300"/>
+              </a:spcAft>
+              <a:buNone/>
+            </a:pPr>
+            <a:r>
+              <a:rPr lang="en-US" sz="1200" dirty="0">
+                <a:solidFill>
+                  <a:srgbClr val="1C2833"/>
+                </a:solidFill>
+                <a:latin typeface="Arial" pitchFamily="34" charset="0"/>
+                <a:ea typeface="Arial" pitchFamily="34" charset="-122"/>
+                <a:cs typeface="Arial" pitchFamily="34" charset="-120"/>
+              </a:rPr>
+              <a:t> — "luminary; astronomy/astrology"</a:t>
+            </a:r>
+            <a:endParaRPr lang="en-US" sz="1200" dirty="0"/>
+          </a:p>
+        </p:txBody>
+      </p:sp>
+      <p:sp>
+        <p:nvSpPr>
+          <p:cNvPr id="5" name="Text 3"/>
           <p:cNvSpPr/>
           <p:nvPr/>
         </p:nvSpPr>
@@ -3696,7 +6053,7 @@
                 <a:ea typeface="Georgia" pitchFamily="34" charset="-122"/>
                 <a:cs typeface="Georgia" pitchFamily="34" charset="-120"/>
               </a:rPr>
-              <a:t>Warm-up (5 min)</a:t>
+              <a:t>Flow</a:t>
             </a:r>
             <a:endParaRPr lang="en-US" sz="1800" dirty="0"/>
           </a:p>
@@ -3705,54 +6062,6 @@
       <p:sp>
         <p:nvSpPr>
           <p:cNvPr id="4" name="Text 2"/>
-          <p:cNvSpPr/>
-          <p:nvPr/>
-        </p:nvSpPr>
-        <p:spPr>
-          <a:xfrm>
-            <a:off x="406301" y="870942"/>
-            <a:ext cx="8498026" cy="213271"/>
-          </a:xfrm>
-          <a:prstGeom prst="rect">
-            <a:avLst/>
-          </a:prstGeom>
-          <a:noFill/>
-          <a:ln/>
-        </p:spPr>
-        <p:txBody>
-          <a:bodyPr wrap="square" lIns="0" tIns="0" rIns="0" bIns="0" rtlCol="0" anchor="t"/>
-          <a:lstStyle/>
-          <a:p>
-            <a:pPr algn="l" indent="0" marL="0">
-              <a:lnSpc>
-                <a:spcPts val="1680"/>
-              </a:lnSpc>
-              <a:spcBef>
-                <a:spcPts val="300"/>
-              </a:spcBef>
-              <a:spcAft>
-                <a:spcPts val="300"/>
-              </a:spcAft>
-              <a:buNone/>
-            </a:pPr>
-            <a:r>
-              <a:rPr lang="en-US" sz="1200" dirty="0">
-                <a:solidFill>
-                  <a:srgbClr val="1C2833"/>
-                </a:solidFill>
-                <a:latin typeface="Arial" pitchFamily="34" charset="0"/>
-                <a:ea typeface="Arial" pitchFamily="34" charset="-122"/>
-                <a:cs typeface="Arial" pitchFamily="34" charset="-120"/>
-              </a:rPr>
-              <a:t>Daily prompt + recall: 2 students name the 4 Vedas + 4 layers from yesterday.</a:t>
-            </a:r>
-            <a:endParaRPr lang="en-US" sz="1200" dirty="0"/>
-          </a:p>
-        </p:txBody>
-      </p:sp>
-      <p:sp>
-        <p:nvSpPr>
-          <p:cNvPr id="5" name="Text 3"/>
           <p:cNvSpPr/>
           <p:nvPr/>
         </p:nvSpPr>
@@ -3902,7 +6211,7 @@
                 <a:ea typeface="Georgia" pitchFamily="34" charset="-122"/>
                 <a:cs typeface="Georgia" pitchFamily="34" charset="-120"/>
               </a:rPr>
-              <a:t>Activity (15 min) — Matching game</a:t>
+              <a:t>Warm-up (5 min)</a:t>
             </a:r>
             <a:endParaRPr lang="en-US" sz="1800" dirty="0"/>
           </a:p>
@@ -3917,7 +6226,7 @@
         <p:spPr>
           <a:xfrm>
             <a:off x="406301" y="870942"/>
-            <a:ext cx="8498026" cy="426541"/>
+            <a:ext cx="8498026" cy="213271"/>
           </a:xfrm>
           <a:prstGeom prst="rect">
             <a:avLst/>
@@ -3950,7 +6259,7 @@
                 <a:ea typeface="Arial" pitchFamily="34" charset="-122"/>
                 <a:cs typeface="Arial" pitchFamily="34" charset="-120"/>
               </a:rPr>
-              <a:t>Pairs. 12 cards (6 Sanskrit names + 6 function descriptions) shuffled face-down. Memory-match game. First pair done writes their match on the board.</a:t>
+              <a:t>Daily prompt + recall: 2 students name the 4 Vedas + 4 layers from yesterday.</a:t>
             </a:r>
             <a:endParaRPr lang="en-US" sz="1200" dirty="0"/>
           </a:p>
@@ -3959,77 +6268,6 @@
       <p:sp>
         <p:nvSpPr>
           <p:cNvPr id="5" name="Text 3"/>
-          <p:cNvSpPr/>
-          <p:nvPr/>
-        </p:nvSpPr>
-        <p:spPr>
-          <a:xfrm>
-            <a:off x="406301" y="1373684"/>
-            <a:ext cx="8498026" cy="213271"/>
-          </a:xfrm>
-          <a:prstGeom prst="rect">
-            <a:avLst/>
-          </a:prstGeom>
-          <a:noFill/>
-          <a:ln/>
-        </p:spPr>
-        <p:txBody>
-          <a:bodyPr wrap="square" lIns="0" tIns="0" rIns="0" bIns="0" rtlCol="0" anchor="t"/>
-          <a:lstStyle/>
-          <a:p>
-            <a:pPr algn="l" indent="0" marL="0">
-              <a:lnSpc>
-                <a:spcPts val="1680"/>
-              </a:lnSpc>
-              <a:spcBef>
-                <a:spcPts val="300"/>
-              </a:spcBef>
-              <a:spcAft>
-                <a:spcPts val="300"/>
-              </a:spcAft>
-              <a:buNone/>
-            </a:pPr>
-            <a:r>
-              <a:rPr lang="en-US" sz="1200" dirty="0">
-                <a:solidFill>
-                  <a:srgbClr val="1C2833"/>
-                </a:solidFill>
-                <a:latin typeface="Arial" pitchFamily="34" charset="0"/>
-                <a:ea typeface="Arial" pitchFamily="34" charset="-122"/>
-                <a:cs typeface="Arial" pitchFamily="34" charset="-120"/>
-              </a:rPr>
-              <a:t>Then class discusses: </a:t>
-            </a:r>
-            <a:pPr algn="l" indent="0" marL="0">
-              <a:lnSpc>
-                <a:spcPts val="1680"/>
-              </a:lnSpc>
-              <a:spcBef>
-                <a:spcPts val="300"/>
-              </a:spcBef>
-              <a:spcAft>
-                <a:spcPts val="300"/>
-              </a:spcAft>
-              <a:buNone/>
-            </a:pPr>
-            <a:r>
-              <a:rPr lang="en-US" sz="1200" i="1" dirty="0">
-                <a:solidFill>
-                  <a:srgbClr val="1C2833"/>
-                </a:solidFill>
-                <a:latin typeface="Arial" pitchFamily="34" charset="0"/>
-                <a:ea typeface="Arial" pitchFamily="34" charset="-122"/>
-                <a:cs typeface="Arial" pitchFamily="34" charset="-120"/>
-              </a:rPr>
-              <a:t>"Which Vedāṅga surprised you most? Why?"</a:t>
-            </a:r>
-            <a:endParaRPr lang="en-US" sz="1200" dirty="0"/>
-          </a:p>
-        </p:txBody>
-      </p:sp>
-      <p:sp>
-        <p:nvSpPr>
-          <p:cNvPr id="6" name="Text 4"/>
           <p:cNvSpPr/>
           <p:nvPr/>
         </p:nvSpPr>
@@ -4179,7 +6417,7 @@
                 <a:ea typeface="Georgia" pitchFamily="34" charset="-122"/>
                 <a:cs typeface="Georgia" pitchFamily="34" charset="-120"/>
               </a:rPr>
-              <a:t>Wrap-up (5 min)</a:t>
+              <a:t>Core (20 min)</a:t>
             </a:r>
             <a:endParaRPr lang="en-US" sz="1800" dirty="0"/>
           </a:p>
@@ -4193,8 +6431,8 @@
         </p:nvSpPr>
         <p:spPr>
           <a:xfrm>
-            <a:off x="406301" y="870942"/>
-            <a:ext cx="8498026" cy="426541"/>
+            <a:off x="634901" y="883593"/>
+            <a:ext cx="8102798" cy="281880"/>
           </a:xfrm>
           <a:prstGeom prst="rect">
             <a:avLst/>
@@ -4206,6 +6444,72 @@
           <a:bodyPr wrap="square" lIns="0" tIns="0" rIns="0" bIns="0" rtlCol="0" anchor="t"/>
           <a:lstStyle/>
           <a:p>
+            <a:pPr algn="l" marL="342900" indent="-342900">
+              <a:lnSpc>
+                <a:spcPts val="1620"/>
+              </a:lnSpc>
+              <a:spcAft>
+                <a:spcPts val="300"/>
+              </a:spcAft>
+              <a:buSzPct val="100000"/>
+              <a:buChar char="•"/>
+            </a:pPr>
+            <a:r>
+              <a:rPr lang="en-US" sz="1200" b="1" dirty="0">
+                <a:solidFill>
+                  <a:srgbClr val="1C2833"/>
+                </a:solidFill>
+                <a:latin typeface="Arial" pitchFamily="34" charset="0"/>
+                <a:ea typeface="Arial" pitchFamily="34" charset="-122"/>
+                <a:cs typeface="Arial" pitchFamily="34" charset="-120"/>
+              </a:rPr>
+              <a:t>The Six Vedāṅgas</a:t>
+            </a:r>
+            <a:pPr algn="l" indent="0" marL="0">
+              <a:lnSpc>
+                <a:spcPts val="1620"/>
+              </a:lnSpc>
+              <a:spcAft>
+                <a:spcPts val="300"/>
+              </a:spcAft>
+              <a:buNone/>
+            </a:pPr>
+            <a:r>
+              <a:rPr lang="en-US" sz="1200" dirty="0">
+                <a:solidFill>
+                  <a:srgbClr val="1C2833"/>
+                </a:solidFill>
+                <a:latin typeface="Arial" pitchFamily="34" charset="0"/>
+                <a:ea typeface="Arial" pitchFamily="34" charset="-122"/>
+                <a:cs typeface="Arial" pitchFamily="34" charset="-120"/>
+              </a:rPr>
+              <a:t> (write on board, then build each row):</a:t>
+            </a:r>
+            <a:endParaRPr lang="en-US" sz="1200" dirty="0"/>
+          </a:p>
+        </p:txBody>
+      </p:sp>
+      <p:sp>
+        <p:nvSpPr>
+          <p:cNvPr id="5" name="Text 3"/>
+          <p:cNvSpPr/>
+          <p:nvPr/>
+        </p:nvSpPr>
+        <p:spPr>
+          <a:xfrm>
+            <a:off x="406301" y="1254323"/>
+            <a:ext cx="8498026" cy="213271"/>
+          </a:xfrm>
+          <a:prstGeom prst="rect">
+            <a:avLst/>
+          </a:prstGeom>
+          <a:noFill/>
+          <a:ln/>
+        </p:spPr>
+        <p:txBody>
+          <a:bodyPr wrap="square" lIns="0" tIns="0" rIns="0" bIns="0" rtlCol="0" anchor="t"/>
+          <a:lstStyle/>
+          <a:p>
             <a:pPr algn="l" indent="0" marL="0">
               <a:lnSpc>
                 <a:spcPts val="1680"/>
@@ -4219,29 +6523,6 @@
               <a:buNone/>
             </a:pPr>
             <a:r>
-              <a:rPr lang="en-US" sz="1200" dirty="0">
-                <a:solidFill>
-                  <a:srgbClr val="1C2833"/>
-                </a:solidFill>
-                <a:latin typeface="Arial" pitchFamily="34" charset="0"/>
-                <a:ea typeface="Arial" pitchFamily="34" charset="-122"/>
-                <a:cs typeface="Arial" pitchFamily="34" charset="-120"/>
-              </a:rPr>
-              <a:t>– Exit ticket: name 3 of the 6 Vedāṅgas with their functions. – Preview Day 4: </a:t>
-            </a:r>
-            <a:pPr algn="l" indent="0" marL="0">
-              <a:lnSpc>
-                <a:spcPts val="1680"/>
-              </a:lnSpc>
-              <a:spcBef>
-                <a:spcPts val="300"/>
-              </a:spcBef>
-              <a:spcAft>
-                <a:spcPts val="300"/>
-              </a:spcAft>
-              <a:buNone/>
-            </a:pPr>
-            <a:r>
               <a:rPr lang="en-US" sz="1200" i="1" dirty="0">
                 <a:solidFill>
                   <a:srgbClr val="1C2833"/>
@@ -4250,7 +6531,7 @@
                 <a:ea typeface="Arial" pitchFamily="34" charset="-122"/>
                 <a:cs typeface="Arial" pitchFamily="34" charset="-120"/>
               </a:rPr>
-              <a:t>"Tomorrow — the Upavedas. Four APPLIED sciences."</a:t>
+              <a:t>Each row: # · Sanskrit · Function · Modern equivalent.</a:t>
             </a:r>
             <a:endParaRPr lang="en-US" sz="1200" dirty="0"/>
           </a:p>
@@ -4258,7 +6539,7 @@
       </p:sp>
       <p:sp>
         <p:nvSpPr>
-          <p:cNvPr id="5" name="Text 3"/>
+          <p:cNvPr id="6" name="Text 4"/>
           <p:cNvSpPr/>
           <p:nvPr/>
         </p:nvSpPr>
@@ -4408,7 +6689,7 @@
                 <a:ea typeface="Georgia" pitchFamily="34" charset="-122"/>
                 <a:cs typeface="Georgia" pitchFamily="34" charset="-120"/>
               </a:rPr>
-              <a:t>Student-facing content</a:t>
+              <a:t>Core (20 min) (cont.)</a:t>
             </a:r>
             <a:endParaRPr lang="en-US" sz="1800" dirty="0"/>
           </a:p>
@@ -4422,61 +6703,8 @@
         </p:nvSpPr>
         <p:spPr>
           <a:xfrm>
-            <a:off x="406301" y="883593"/>
-            <a:ext cx="8331398" cy="1843088"/>
-          </a:xfrm>
-          <a:prstGeom prst="rect">
-            <a:avLst/>
-          </a:prstGeom>
-          <a:solidFill>
-            <a:srgbClr val="F4F8F9"/>
-          </a:solidFill>
-          <a:ln/>
-        </p:spPr>
-        <p:txBody>
-          <a:bodyPr wrap="square" rtlCol="0" anchor="ctr"/>
-          <a:lstStyle/>
-          <a:p>
-            <a:pPr indent="0" marL="0">
-              <a:buNone/>
-            </a:pPr>
-            <a:endParaRPr lang="en-US" dirty="0"/>
-          </a:p>
-        </p:txBody>
-      </p:sp>
-      <p:sp>
-        <p:nvSpPr>
-          <p:cNvPr id="5" name="Shape 3"/>
-          <p:cNvSpPr/>
-          <p:nvPr/>
-        </p:nvSpPr>
-        <p:spPr>
-          <a:xfrm>
-            <a:off x="434876" y="883593"/>
-            <a:ext cx="0" cy="1843088"/>
-          </a:xfrm>
-          <a:prstGeom prst="line">
-            <a:avLst/>
-          </a:prstGeom>
-          <a:noFill/>
-          <a:ln w="57150">
-            <a:solidFill>
-              <a:srgbClr val="FE4447"/>
-            </a:solidFill>
-            <a:prstDash val="solid"/>
-          </a:ln>
-        </p:spPr>
-      </p:sp>
-      <p:sp>
-        <p:nvSpPr>
-          <p:cNvPr id="6" name="Text 4"/>
-          <p:cNvSpPr/>
-          <p:nvPr/>
-        </p:nvSpPr>
-        <p:spPr>
-          <a:xfrm>
-            <a:off x="692051" y="1074093"/>
-            <a:ext cx="7973389" cy="230981"/>
+            <a:off x="634901" y="883593"/>
+            <a:ext cx="8102798" cy="1500783"/>
           </a:xfrm>
           <a:prstGeom prst="rect">
             <a:avLst/>
@@ -4488,178 +6716,514 @@
           <a:bodyPr wrap="square" lIns="0" tIns="0" rIns="0" bIns="0" rtlCol="0" anchor="t"/>
           <a:lstStyle/>
           <a:p>
-            <a:pPr algn="l" indent="0" marL="0">
-              <a:lnSpc>
-                <a:spcPts val="1820"/>
-              </a:lnSpc>
-              <a:spcBef>
-                <a:spcPts val="300"/>
-              </a:spcBef>
-              <a:spcAft>
-                <a:spcPts val="300"/>
-              </a:spcAft>
-              <a:buNone/>
-            </a:pPr>
-            <a:r>
-              <a:rPr lang="en-US" sz="1300" b="1" i="1" dirty="0">
-                <a:solidFill>
-                  <a:srgbClr val="1C2833"/>
-                </a:solidFill>
-                <a:latin typeface="Georgia" pitchFamily="34" charset="0"/>
-                <a:ea typeface="Georgia" pitchFamily="34" charset="-122"/>
-                <a:cs typeface="Georgia" pitchFamily="34" charset="-120"/>
-              </a:rPr>
-              <a:t>The Six Vedāṅgas — "limbs of the Veda"</a:t>
-            </a:r>
-            <a:endParaRPr lang="en-US" sz="1300" dirty="0"/>
-          </a:p>
-        </p:txBody>
-      </p:sp>
-      <p:sp>
-        <p:nvSpPr>
-          <p:cNvPr id="7" name="Text 5"/>
-          <p:cNvSpPr/>
-          <p:nvPr/>
-        </p:nvSpPr>
-        <p:spPr>
-          <a:xfrm>
-            <a:off x="692051" y="1343174"/>
-            <a:ext cx="7973389" cy="692944"/>
-          </a:xfrm>
-          <a:prstGeom prst="rect">
-            <a:avLst/>
-          </a:prstGeom>
-          <a:noFill/>
-          <a:ln/>
-        </p:spPr>
-        <p:txBody>
-          <a:bodyPr wrap="square" lIns="0" tIns="0" rIns="0" bIns="0" rtlCol="0" anchor="t"/>
-          <a:lstStyle/>
-          <a:p>
-            <a:pPr algn="l" indent="0" marL="0">
-              <a:lnSpc>
-                <a:spcPts val="1820"/>
-              </a:lnSpc>
-              <a:spcBef>
-                <a:spcPts val="300"/>
-              </a:spcBef>
-              <a:spcAft>
-                <a:spcPts val="300"/>
-              </a:spcAft>
-              <a:buNone/>
-            </a:pPr>
-            <a:r>
-              <a:rPr lang="en-US" sz="1300" i="1" dirty="0">
-                <a:solidFill>
-                  <a:srgbClr val="1C2833"/>
-                </a:solidFill>
-                <a:latin typeface="Georgia" pitchFamily="34" charset="0"/>
-                <a:ea typeface="Georgia" pitchFamily="34" charset="-122"/>
-                <a:cs typeface="Georgia" pitchFamily="34" charset="-120"/>
-              </a:rPr>
-              <a:t>| # | Sanskrit | Function | |---|----------|----------| | 1 | Śikṣā | Pronunciation, phonetics | | 2 | Kalpa | Ritual procedure | | 3 | Vyākaraṇa | Grammar | | 4 | Nirukta | Etymology | | 5 | Chandas | Poetic metre | | 6 | Jyotiṣa | Astronomy &amp; astrology |</a:t>
-            </a:r>
-            <a:endParaRPr lang="en-US" sz="1300" dirty="0"/>
-          </a:p>
-        </p:txBody>
-      </p:sp>
-      <p:sp>
-        <p:nvSpPr>
-          <p:cNvPr id="8" name="Text 6"/>
-          <p:cNvSpPr/>
-          <p:nvPr/>
-        </p:nvSpPr>
-        <p:spPr>
-          <a:xfrm>
-            <a:off x="692051" y="2074218"/>
-            <a:ext cx="7973389" cy="461963"/>
-          </a:xfrm>
-          <a:prstGeom prst="rect">
-            <a:avLst/>
-          </a:prstGeom>
-          <a:noFill/>
-          <a:ln/>
-        </p:spPr>
-        <p:txBody>
-          <a:bodyPr wrap="square" lIns="0" tIns="0" rIns="0" bIns="0" rtlCol="0" anchor="t"/>
-          <a:lstStyle/>
-          <a:p>
-            <a:pPr algn="l" indent="0" marL="0">
-              <a:lnSpc>
-                <a:spcPts val="1820"/>
-              </a:lnSpc>
-              <a:spcBef>
-                <a:spcPts val="300"/>
-              </a:spcBef>
-              <a:spcAft>
-                <a:spcPts val="300"/>
-              </a:spcAft>
-              <a:buNone/>
-            </a:pPr>
-            <a:r>
-              <a:rPr lang="en-US" sz="1300" dirty="0">
-                <a:solidFill>
-                  <a:srgbClr val="1C2833"/>
-                </a:solidFill>
-                <a:latin typeface="Georgia" pitchFamily="34" charset="0"/>
-                <a:ea typeface="Georgia" pitchFamily="34" charset="-122"/>
-                <a:cs typeface="Georgia" pitchFamily="34" charset="-120"/>
-              </a:rPr>
-              <a:t>*</a:t>
-            </a:r>
-            <a:pPr algn="l" indent="0" marL="0">
-              <a:lnSpc>
-                <a:spcPts val="1820"/>
-              </a:lnSpc>
-              <a:spcBef>
-                <a:spcPts val="300"/>
-              </a:spcBef>
-              <a:spcAft>
-                <a:spcPts val="300"/>
-              </a:spcAft>
-              <a:buNone/>
-            </a:pPr>
-            <a:r>
-              <a:rPr lang="en-US" sz="1300" i="1" dirty="0">
-                <a:solidFill>
-                  <a:srgbClr val="1C2833"/>
-                </a:solidFill>
-                <a:latin typeface="Georgia" pitchFamily="34" charset="0"/>
-                <a:ea typeface="Georgia" pitchFamily="34" charset="-122"/>
-                <a:cs typeface="Georgia" pitchFamily="34" charset="-120"/>
-              </a:rPr>
-              <a:t>Pāṇini's</a:t>
-            </a:r>
-            <a:pPr algn="l" indent="0" marL="0">
-              <a:lnSpc>
-                <a:spcPts val="1820"/>
-              </a:lnSpc>
-              <a:spcBef>
-                <a:spcPts val="300"/>
-              </a:spcBef>
-              <a:spcAft>
-                <a:spcPts val="300"/>
-              </a:spcAft>
-              <a:buNone/>
-            </a:pPr>
-            <a:r>
-              <a:rPr lang="en-US" sz="1300" dirty="0">
-                <a:solidFill>
-                  <a:srgbClr val="1C2833"/>
-                </a:solidFill>
-                <a:latin typeface="Georgia" pitchFamily="34" charset="0"/>
-                <a:ea typeface="Georgia" pitchFamily="34" charset="-122"/>
-                <a:cs typeface="Georgia" pitchFamily="34" charset="-120"/>
-              </a:rPr>
-              <a:t>Aṣṭādhyāyī*** (~4th c. BCE) — under Vyākaraṇa — is widely considered the first formal grammar of any language. ~4000 sūtras.</a:t>
-            </a:r>
-            <a:endParaRPr lang="en-US" sz="1300" dirty="0"/>
-          </a:p>
-        </p:txBody>
-      </p:sp>
-      <p:sp>
-        <p:nvSpPr>
-          <p:cNvPr id="9" name="Text 7"/>
+            <a:pPr algn="l" marL="342900" indent="-342900">
+              <a:lnSpc>
+                <a:spcPts val="1620"/>
+              </a:lnSpc>
+              <a:spcAft>
+                <a:spcPts val="300"/>
+              </a:spcAft>
+              <a:buSzPct val="100000"/>
+              <a:buChar char="•"/>
+            </a:pPr>
+            <a:r>
+              <a:rPr lang="en-US" sz="1200" b="1" dirty="0">
+                <a:solidFill>
+                  <a:srgbClr val="1C2833"/>
+                </a:solidFill>
+                <a:latin typeface="Arial" pitchFamily="34" charset="0"/>
+                <a:ea typeface="Arial" pitchFamily="34" charset="-122"/>
+                <a:cs typeface="Arial" pitchFamily="34" charset="-120"/>
+              </a:rPr>
+              <a:t>1</a:t>
+            </a:r>
+            <a:pPr algn="l" indent="0" marL="0">
+              <a:lnSpc>
+                <a:spcPts val="1620"/>
+              </a:lnSpc>
+              <a:spcAft>
+                <a:spcPts val="300"/>
+              </a:spcAft>
+              <a:buNone/>
+            </a:pPr>
+            <a:r>
+              <a:rPr lang="en-US" sz="1200" dirty="0">
+                <a:solidFill>
+                  <a:srgbClr val="1C2833"/>
+                </a:solidFill>
+                <a:latin typeface="Arial" pitchFamily="34" charset="0"/>
+                <a:ea typeface="Arial" pitchFamily="34" charset="-122"/>
+                <a:cs typeface="Arial" pitchFamily="34" charset="-120"/>
+              </a:rPr>
+              <a:t> — </a:t>
+            </a:r>
+            <a:pPr algn="l" indent="0" marL="0">
+              <a:lnSpc>
+                <a:spcPts val="1620"/>
+              </a:lnSpc>
+              <a:spcAft>
+                <a:spcPts val="300"/>
+              </a:spcAft>
+              <a:buNone/>
+            </a:pPr>
+            <a:r>
+              <a:rPr lang="en-US" sz="1200" i="1" dirty="0">
+                <a:solidFill>
+                  <a:srgbClr val="1C2833"/>
+                </a:solidFill>
+                <a:latin typeface="Arial" pitchFamily="34" charset="0"/>
+                <a:ea typeface="Arial" pitchFamily="34" charset="-122"/>
+                <a:cs typeface="Arial" pitchFamily="34" charset="-120"/>
+              </a:rPr>
+              <a:t>Śikṣā</a:t>
+            </a:r>
+            <a:pPr algn="l" indent="0" marL="0">
+              <a:lnSpc>
+                <a:spcPts val="1620"/>
+              </a:lnSpc>
+              <a:spcAft>
+                <a:spcPts val="300"/>
+              </a:spcAft>
+              <a:buNone/>
+            </a:pPr>
+            <a:r>
+              <a:rPr lang="en-US" sz="1200" dirty="0">
+                <a:solidFill>
+                  <a:srgbClr val="1C2833"/>
+                </a:solidFill>
+                <a:latin typeface="Arial" pitchFamily="34" charset="0"/>
+                <a:ea typeface="Arial" pitchFamily="34" charset="-122"/>
+                <a:cs typeface="Arial" pitchFamily="34" charset="-120"/>
+              </a:rPr>
+              <a:t> · Phonetics, pronunciation · Linguistics / phonology</a:t>
+            </a:r>
+            <a:endParaRPr lang="en-US" sz="1200" dirty="0"/>
+          </a:p>
+          <a:p>
+            <a:pPr algn="l" marL="342900" indent="-342900">
+              <a:lnSpc>
+                <a:spcPts val="1620"/>
+              </a:lnSpc>
+              <a:spcAft>
+                <a:spcPts val="300"/>
+              </a:spcAft>
+              <a:buSzPct val="100000"/>
+              <a:buChar char="•"/>
+            </a:pPr>
+            <a:r>
+              <a:rPr lang="en-US" sz="1200" b="1" dirty="0">
+                <a:solidFill>
+                  <a:srgbClr val="1C2833"/>
+                </a:solidFill>
+                <a:latin typeface="Arial" pitchFamily="34" charset="0"/>
+                <a:ea typeface="Arial" pitchFamily="34" charset="-122"/>
+                <a:cs typeface="Arial" pitchFamily="34" charset="-120"/>
+              </a:rPr>
+              <a:t>2</a:t>
+            </a:r>
+            <a:pPr algn="l" indent="0" marL="0">
+              <a:lnSpc>
+                <a:spcPts val="1620"/>
+              </a:lnSpc>
+              <a:spcAft>
+                <a:spcPts val="300"/>
+              </a:spcAft>
+              <a:buNone/>
+            </a:pPr>
+            <a:r>
+              <a:rPr lang="en-US" sz="1200" dirty="0">
+                <a:solidFill>
+                  <a:srgbClr val="1C2833"/>
+                </a:solidFill>
+                <a:latin typeface="Arial" pitchFamily="34" charset="0"/>
+                <a:ea typeface="Arial" pitchFamily="34" charset="-122"/>
+                <a:cs typeface="Arial" pitchFamily="34" charset="-120"/>
+              </a:rPr>
+              <a:t> — </a:t>
+            </a:r>
+            <a:pPr algn="l" indent="0" marL="0">
+              <a:lnSpc>
+                <a:spcPts val="1620"/>
+              </a:lnSpc>
+              <a:spcAft>
+                <a:spcPts val="300"/>
+              </a:spcAft>
+              <a:buNone/>
+            </a:pPr>
+            <a:r>
+              <a:rPr lang="en-US" sz="1200" i="1" dirty="0">
+                <a:solidFill>
+                  <a:srgbClr val="1C2833"/>
+                </a:solidFill>
+                <a:latin typeface="Arial" pitchFamily="34" charset="0"/>
+                <a:ea typeface="Arial" pitchFamily="34" charset="-122"/>
+                <a:cs typeface="Arial" pitchFamily="34" charset="-120"/>
+              </a:rPr>
+              <a:t>Kalpa</a:t>
+            </a:r>
+            <a:pPr algn="l" indent="0" marL="0">
+              <a:lnSpc>
+                <a:spcPts val="1620"/>
+              </a:lnSpc>
+              <a:spcAft>
+                <a:spcPts val="300"/>
+              </a:spcAft>
+              <a:buNone/>
+            </a:pPr>
+            <a:r>
+              <a:rPr lang="en-US" sz="1200" dirty="0">
+                <a:solidFill>
+                  <a:srgbClr val="1C2833"/>
+                </a:solidFill>
+                <a:latin typeface="Arial" pitchFamily="34" charset="0"/>
+                <a:ea typeface="Arial" pitchFamily="34" charset="-122"/>
+                <a:cs typeface="Arial" pitchFamily="34" charset="-120"/>
+              </a:rPr>
+              <a:t> · Ritual procedure · Liturgy</a:t>
+            </a:r>
+            <a:endParaRPr lang="en-US" sz="1200" dirty="0"/>
+          </a:p>
+          <a:p>
+            <a:pPr algn="l" marL="342900" indent="-342900">
+              <a:lnSpc>
+                <a:spcPts val="1620"/>
+              </a:lnSpc>
+              <a:spcAft>
+                <a:spcPts val="300"/>
+              </a:spcAft>
+              <a:buSzPct val="100000"/>
+              <a:buChar char="•"/>
+            </a:pPr>
+            <a:r>
+              <a:rPr lang="en-US" sz="1200" b="1" dirty="0">
+                <a:solidFill>
+                  <a:srgbClr val="1C2833"/>
+                </a:solidFill>
+                <a:latin typeface="Arial" pitchFamily="34" charset="0"/>
+                <a:ea typeface="Arial" pitchFamily="34" charset="-122"/>
+                <a:cs typeface="Arial" pitchFamily="34" charset="-120"/>
+              </a:rPr>
+              <a:t>3</a:t>
+            </a:r>
+            <a:pPr algn="l" indent="0" marL="0">
+              <a:lnSpc>
+                <a:spcPts val="1620"/>
+              </a:lnSpc>
+              <a:spcAft>
+                <a:spcPts val="300"/>
+              </a:spcAft>
+              <a:buNone/>
+            </a:pPr>
+            <a:r>
+              <a:rPr lang="en-US" sz="1200" dirty="0">
+                <a:solidFill>
+                  <a:srgbClr val="1C2833"/>
+                </a:solidFill>
+                <a:latin typeface="Arial" pitchFamily="34" charset="0"/>
+                <a:ea typeface="Arial" pitchFamily="34" charset="-122"/>
+                <a:cs typeface="Arial" pitchFamily="34" charset="-120"/>
+              </a:rPr>
+              <a:t> — </a:t>
+            </a:r>
+            <a:pPr algn="l" indent="0" marL="0">
+              <a:lnSpc>
+                <a:spcPts val="1620"/>
+              </a:lnSpc>
+              <a:spcAft>
+                <a:spcPts val="300"/>
+              </a:spcAft>
+              <a:buNone/>
+            </a:pPr>
+            <a:r>
+              <a:rPr lang="en-US" sz="1200" i="1" dirty="0">
+                <a:solidFill>
+                  <a:srgbClr val="1C2833"/>
+                </a:solidFill>
+                <a:latin typeface="Arial" pitchFamily="34" charset="0"/>
+                <a:ea typeface="Arial" pitchFamily="34" charset="-122"/>
+                <a:cs typeface="Arial" pitchFamily="34" charset="-120"/>
+              </a:rPr>
+              <a:t>Vyākaraṇa</a:t>
+            </a:r>
+            <a:pPr algn="l" indent="0" marL="0">
+              <a:lnSpc>
+                <a:spcPts val="1620"/>
+              </a:lnSpc>
+              <a:spcAft>
+                <a:spcPts val="300"/>
+              </a:spcAft>
+              <a:buNone/>
+            </a:pPr>
+            <a:r>
+              <a:rPr lang="en-US" sz="1200" dirty="0">
+                <a:solidFill>
+                  <a:srgbClr val="1C2833"/>
+                </a:solidFill>
+                <a:latin typeface="Arial" pitchFamily="34" charset="0"/>
+                <a:ea typeface="Arial" pitchFamily="34" charset="-122"/>
+                <a:cs typeface="Arial" pitchFamily="34" charset="-120"/>
+              </a:rPr>
+              <a:t> · Grammar (peaks in Pāṇini ~4th c. BCE) · Formal grammar / parsing</a:t>
+            </a:r>
+            <a:endParaRPr lang="en-US" sz="1200" dirty="0"/>
+          </a:p>
+          <a:p>
+            <a:pPr algn="l" marL="342900" indent="-342900">
+              <a:lnSpc>
+                <a:spcPts val="1620"/>
+              </a:lnSpc>
+              <a:spcAft>
+                <a:spcPts val="300"/>
+              </a:spcAft>
+              <a:buSzPct val="100000"/>
+              <a:buChar char="•"/>
+            </a:pPr>
+            <a:r>
+              <a:rPr lang="en-US" sz="1200" b="1" dirty="0">
+                <a:solidFill>
+                  <a:srgbClr val="1C2833"/>
+                </a:solidFill>
+                <a:latin typeface="Arial" pitchFamily="34" charset="0"/>
+                <a:ea typeface="Arial" pitchFamily="34" charset="-122"/>
+                <a:cs typeface="Arial" pitchFamily="34" charset="-120"/>
+              </a:rPr>
+              <a:t>4</a:t>
+            </a:r>
+            <a:pPr algn="l" indent="0" marL="0">
+              <a:lnSpc>
+                <a:spcPts val="1620"/>
+              </a:lnSpc>
+              <a:spcAft>
+                <a:spcPts val="300"/>
+              </a:spcAft>
+              <a:buNone/>
+            </a:pPr>
+            <a:r>
+              <a:rPr lang="en-US" sz="1200" dirty="0">
+                <a:solidFill>
+                  <a:srgbClr val="1C2833"/>
+                </a:solidFill>
+                <a:latin typeface="Arial" pitchFamily="34" charset="0"/>
+                <a:ea typeface="Arial" pitchFamily="34" charset="-122"/>
+                <a:cs typeface="Arial" pitchFamily="34" charset="-120"/>
+              </a:rPr>
+              <a:t> — </a:t>
+            </a:r>
+            <a:pPr algn="l" indent="0" marL="0">
+              <a:lnSpc>
+                <a:spcPts val="1620"/>
+              </a:lnSpc>
+              <a:spcAft>
+                <a:spcPts val="300"/>
+              </a:spcAft>
+              <a:buNone/>
+            </a:pPr>
+            <a:r>
+              <a:rPr lang="en-US" sz="1200" i="1" dirty="0">
+                <a:solidFill>
+                  <a:srgbClr val="1C2833"/>
+                </a:solidFill>
+                <a:latin typeface="Arial" pitchFamily="34" charset="0"/>
+                <a:ea typeface="Arial" pitchFamily="34" charset="-122"/>
+                <a:cs typeface="Arial" pitchFamily="34" charset="-120"/>
+              </a:rPr>
+              <a:t>Nirukta</a:t>
+            </a:r>
+            <a:pPr algn="l" indent="0" marL="0">
+              <a:lnSpc>
+                <a:spcPts val="1620"/>
+              </a:lnSpc>
+              <a:spcAft>
+                <a:spcPts val="300"/>
+              </a:spcAft>
+              <a:buNone/>
+            </a:pPr>
+            <a:r>
+              <a:rPr lang="en-US" sz="1200" dirty="0">
+                <a:solidFill>
+                  <a:srgbClr val="1C2833"/>
+                </a:solidFill>
+                <a:latin typeface="Arial" pitchFamily="34" charset="0"/>
+                <a:ea typeface="Arial" pitchFamily="34" charset="-122"/>
+                <a:cs typeface="Arial" pitchFamily="34" charset="-120"/>
+              </a:rPr>
+              <a:t> · Etymology · Lexicography</a:t>
+            </a:r>
+            <a:endParaRPr lang="en-US" sz="1200" dirty="0"/>
+          </a:p>
+          <a:p>
+            <a:pPr algn="l" marL="342900" indent="-342900">
+              <a:lnSpc>
+                <a:spcPts val="1620"/>
+              </a:lnSpc>
+              <a:spcAft>
+                <a:spcPts val="300"/>
+              </a:spcAft>
+              <a:buSzPct val="100000"/>
+              <a:buChar char="•"/>
+            </a:pPr>
+            <a:r>
+              <a:rPr lang="en-US" sz="1200" b="1" dirty="0">
+                <a:solidFill>
+                  <a:srgbClr val="1C2833"/>
+                </a:solidFill>
+                <a:latin typeface="Arial" pitchFamily="34" charset="0"/>
+                <a:ea typeface="Arial" pitchFamily="34" charset="-122"/>
+                <a:cs typeface="Arial" pitchFamily="34" charset="-120"/>
+              </a:rPr>
+              <a:t>5</a:t>
+            </a:r>
+            <a:pPr algn="l" indent="0" marL="0">
+              <a:lnSpc>
+                <a:spcPts val="1620"/>
+              </a:lnSpc>
+              <a:spcAft>
+                <a:spcPts val="300"/>
+              </a:spcAft>
+              <a:buNone/>
+            </a:pPr>
+            <a:r>
+              <a:rPr lang="en-US" sz="1200" dirty="0">
+                <a:solidFill>
+                  <a:srgbClr val="1C2833"/>
+                </a:solidFill>
+                <a:latin typeface="Arial" pitchFamily="34" charset="0"/>
+                <a:ea typeface="Arial" pitchFamily="34" charset="-122"/>
+                <a:cs typeface="Arial" pitchFamily="34" charset="-120"/>
+              </a:rPr>
+              <a:t> — </a:t>
+            </a:r>
+            <a:pPr algn="l" indent="0" marL="0">
+              <a:lnSpc>
+                <a:spcPts val="1620"/>
+              </a:lnSpc>
+              <a:spcAft>
+                <a:spcPts val="300"/>
+              </a:spcAft>
+              <a:buNone/>
+            </a:pPr>
+            <a:r>
+              <a:rPr lang="en-US" sz="1200" i="1" dirty="0">
+                <a:solidFill>
+                  <a:srgbClr val="1C2833"/>
+                </a:solidFill>
+                <a:latin typeface="Arial" pitchFamily="34" charset="0"/>
+                <a:ea typeface="Arial" pitchFamily="34" charset="-122"/>
+                <a:cs typeface="Arial" pitchFamily="34" charset="-120"/>
+              </a:rPr>
+              <a:t>Chandas</a:t>
+            </a:r>
+            <a:pPr algn="l" indent="0" marL="0">
+              <a:lnSpc>
+                <a:spcPts val="1620"/>
+              </a:lnSpc>
+              <a:spcAft>
+                <a:spcPts val="300"/>
+              </a:spcAft>
+              <a:buNone/>
+            </a:pPr>
+            <a:r>
+              <a:rPr lang="en-US" sz="1200" dirty="0">
+                <a:solidFill>
+                  <a:srgbClr val="1C2833"/>
+                </a:solidFill>
+                <a:latin typeface="Arial" pitchFamily="34" charset="0"/>
+                <a:ea typeface="Arial" pitchFamily="34" charset="-122"/>
+                <a:cs typeface="Arial" pitchFamily="34" charset="-120"/>
+              </a:rPr>
+              <a:t> · Prosody (poetic metre) · Poetics</a:t>
+            </a:r>
+            <a:endParaRPr lang="en-US" sz="1200" dirty="0"/>
+          </a:p>
+          <a:p>
+            <a:pPr algn="l" marL="342900" indent="-342900">
+              <a:lnSpc>
+                <a:spcPts val="1620"/>
+              </a:lnSpc>
+              <a:spcAft>
+                <a:spcPts val="300"/>
+              </a:spcAft>
+              <a:buSzPct val="100000"/>
+              <a:buChar char="•"/>
+            </a:pPr>
+            <a:r>
+              <a:rPr lang="en-US" sz="1200" b="1" dirty="0">
+                <a:solidFill>
+                  <a:srgbClr val="1C2833"/>
+                </a:solidFill>
+                <a:latin typeface="Arial" pitchFamily="34" charset="0"/>
+                <a:ea typeface="Arial" pitchFamily="34" charset="-122"/>
+                <a:cs typeface="Arial" pitchFamily="34" charset="-120"/>
+              </a:rPr>
+              <a:t>6</a:t>
+            </a:r>
+            <a:pPr algn="l" indent="0" marL="0">
+              <a:lnSpc>
+                <a:spcPts val="1620"/>
+              </a:lnSpc>
+              <a:spcAft>
+                <a:spcPts val="300"/>
+              </a:spcAft>
+              <a:buNone/>
+            </a:pPr>
+            <a:r>
+              <a:rPr lang="en-US" sz="1200" dirty="0">
+                <a:solidFill>
+                  <a:srgbClr val="1C2833"/>
+                </a:solidFill>
+                <a:latin typeface="Arial" pitchFamily="34" charset="0"/>
+                <a:ea typeface="Arial" pitchFamily="34" charset="-122"/>
+                <a:cs typeface="Arial" pitchFamily="34" charset="-120"/>
+              </a:rPr>
+              <a:t> — </a:t>
+            </a:r>
+            <a:pPr algn="l" indent="0" marL="0">
+              <a:lnSpc>
+                <a:spcPts val="1620"/>
+              </a:lnSpc>
+              <a:spcAft>
+                <a:spcPts val="300"/>
+              </a:spcAft>
+              <a:buNone/>
+            </a:pPr>
+            <a:r>
+              <a:rPr lang="en-US" sz="1200" i="1" dirty="0">
+                <a:solidFill>
+                  <a:srgbClr val="1C2833"/>
+                </a:solidFill>
+                <a:latin typeface="Arial" pitchFamily="34" charset="0"/>
+                <a:ea typeface="Arial" pitchFamily="34" charset="-122"/>
+                <a:cs typeface="Arial" pitchFamily="34" charset="-120"/>
+              </a:rPr>
+              <a:t>Jyotiṣa</a:t>
+            </a:r>
+            <a:pPr algn="l" indent="0" marL="0">
+              <a:lnSpc>
+                <a:spcPts val="1620"/>
+              </a:lnSpc>
+              <a:spcAft>
+                <a:spcPts val="300"/>
+              </a:spcAft>
+              <a:buNone/>
+            </a:pPr>
+            <a:r>
+              <a:rPr lang="en-US" sz="1200" dirty="0">
+                <a:solidFill>
+                  <a:srgbClr val="1C2833"/>
+                </a:solidFill>
+                <a:latin typeface="Arial" pitchFamily="34" charset="0"/>
+                <a:ea typeface="Arial" pitchFamily="34" charset="-122"/>
+                <a:cs typeface="Arial" pitchFamily="34" charset="-120"/>
+              </a:rPr>
+              <a:t> · Astronomy / time-keeping · Astronomy + astrology</a:t>
+            </a:r>
+            <a:endParaRPr lang="en-US" sz="1200" dirty="0"/>
+          </a:p>
+        </p:txBody>
+      </p:sp>
+      <p:sp>
+        <p:nvSpPr>
+          <p:cNvPr id="5" name="Text 3"/>
           <p:cNvSpPr/>
           <p:nvPr/>
         </p:nvSpPr>
@@ -4809,7 +7373,7 @@
                 <a:ea typeface="Georgia" pitchFamily="34" charset="-122"/>
                 <a:cs typeface="Georgia" pitchFamily="34" charset="-120"/>
               </a:rPr>
-              <a:t>Homework</a:t>
+              <a:t>Core (20 min) (cont.)</a:t>
             </a:r>
             <a:endParaRPr lang="en-US" sz="1800" dirty="0"/>
           </a:p>
@@ -4823,8 +7387,8 @@
         </p:nvSpPr>
         <p:spPr>
           <a:xfrm>
-            <a:off x="406301" y="870942"/>
-            <a:ext cx="8498026" cy="426541"/>
+            <a:off x="634901" y="883593"/>
+            <a:ext cx="8102798" cy="693241"/>
           </a:xfrm>
           <a:prstGeom prst="rect">
             <a:avLst/>
@@ -4836,13 +7400,31 @@
           <a:bodyPr wrap="square" lIns="0" tIns="0" rIns="0" bIns="0" rtlCol="0" anchor="t"/>
           <a:lstStyle/>
           <a:p>
-            <a:pPr algn="l" indent="0" marL="0">
-              <a:lnSpc>
-                <a:spcPts val="1680"/>
-              </a:lnSpc>
-              <a:spcBef>
-                <a:spcPts val="300"/>
-              </a:spcBef>
+            <a:pPr algn="l" marL="342900" indent="-342900">
+              <a:lnSpc>
+                <a:spcPts val="1620"/>
+              </a:lnSpc>
+              <a:spcAft>
+                <a:spcPts val="300"/>
+              </a:spcAft>
+              <a:buSzPct val="100000"/>
+              <a:buChar char="•"/>
+            </a:pPr>
+            <a:r>
+              <a:rPr lang="en-US" sz="1200" b="1" dirty="0">
+                <a:solidFill>
+                  <a:srgbClr val="1C2833"/>
+                </a:solidFill>
+                <a:latin typeface="Arial" pitchFamily="34" charset="0"/>
+                <a:ea typeface="Arial" pitchFamily="34" charset="-122"/>
+                <a:cs typeface="Arial" pitchFamily="34" charset="-120"/>
+              </a:rPr>
+              <a:t>Why they exist.</a:t>
+            </a:r>
+            <a:pPr algn="l" indent="0" marL="0">
+              <a:lnSpc>
+                <a:spcPts val="1620"/>
+              </a:lnSpc>
               <a:spcAft>
                 <a:spcPts val="300"/>
               </a:spcAft>
@@ -4857,53 +7439,7 @@
                 <a:ea typeface="Arial" pitchFamily="34" charset="-122"/>
                 <a:cs typeface="Arial" pitchFamily="34" charset="-120"/>
               </a:rPr>
-              <a:t>– Look up ONE Sanskrit word in an online etymology resource. Note where it might appear in English vocabulary (e.g. </a:t>
-            </a:r>
-            <a:pPr algn="l" indent="0" marL="0">
-              <a:lnSpc>
-                <a:spcPts val="1680"/>
-              </a:lnSpc>
-              <a:spcBef>
-                <a:spcPts val="300"/>
-              </a:spcBef>
-              <a:spcAft>
-                <a:spcPts val="300"/>
-              </a:spcAft>
-              <a:buNone/>
-            </a:pPr>
-            <a:r>
-              <a:rPr lang="en-US" sz="1200" i="1" dirty="0">
-                <a:solidFill>
-                  <a:srgbClr val="1C2833"/>
-                </a:solidFill>
-                <a:latin typeface="Arial" pitchFamily="34" charset="0"/>
-                <a:ea typeface="Arial" pitchFamily="34" charset="-122"/>
-                <a:cs typeface="Arial" pitchFamily="34" charset="-120"/>
-              </a:rPr>
-              <a:t>mātṛ</a:t>
-            </a:r>
-            <a:pPr algn="l" indent="0" marL="0">
-              <a:lnSpc>
-                <a:spcPts val="1680"/>
-              </a:lnSpc>
-              <a:spcBef>
-                <a:spcPts val="300"/>
-              </a:spcBef>
-              <a:spcAft>
-                <a:spcPts val="300"/>
-              </a:spcAft>
-              <a:buNone/>
-            </a:pPr>
-            <a:r>
-              <a:rPr lang="en-US" sz="1200" dirty="0">
-                <a:solidFill>
-                  <a:srgbClr val="1C2833"/>
-                </a:solidFill>
-                <a:latin typeface="Arial" pitchFamily="34" charset="0"/>
-                <a:ea typeface="Arial" pitchFamily="34" charset="-122"/>
-                <a:cs typeface="Arial" pitchFamily="34" charset="-120"/>
-              </a:rPr>
-              <a:t> → mother). Bring tomorrow.</a:t>
+              <a:t> The Vedas had to be transmitted PRECISELY, orally, across millennia. Six disciplines grew up around the texts to ensure correct pronunciation, ritual use, grammatical understanding, etymological clarity, metrical recitation, and astronomical timing.</a:t>
             </a:r>
             <a:endParaRPr lang="en-US" sz="1200" dirty="0"/>
           </a:p>
